--- a/template1.pptx
+++ b/template1.pptx
@@ -6402,7 +6402,7 @@
           <p:nvPr>
             <p:extLst>
               <p:ext uri="{D42A27DB-BD31-4B8C-83A1-F6EECF244321}">
-                <p14:modId xmlns:p14="http://schemas.microsoft.com/office/powerpoint/2010/main" val="4188422416"/>
+                <p14:modId xmlns:p14="http://schemas.microsoft.com/office/powerpoint/2010/main" val="171168238"/>
               </p:ext>
             </p:extLst>
           </p:nvPr>
@@ -6462,7 +6462,7 @@
                           <a:cs typeface="Albert Sans"/>
                           <a:sym typeface="Albert Sans"/>
                         </a:rPr>
-                        <a:t>H</a:t>
+                        <a:t>Demo H</a:t>
                       </a:r>
                       <a:r>
                         <a:rPr lang="en-GB" sz="1100" b="1" dirty="0" err="1">
@@ -6553,7 +6553,7 @@
                           <a:cs typeface="Albert Sans"/>
                           <a:sym typeface="Albert Sans"/>
                         </a:rPr>
-                        <a:t>Body</a:t>
+                        <a:t>Demo Body</a:t>
                       </a:r>
                       <a:endParaRPr sz="1000" dirty="0">
                         <a:solidFill>
@@ -6860,10 +6860,10 @@
               <a:buNone/>
             </a:pPr>
             <a:r>
-              <a:rPr lang="en"/>
-              <a:t>Contents of this template</a:t>
+              <a:rPr lang="en" dirty="0"/>
+              <a:t>Demo Page</a:t>
             </a:r>
-            <a:endParaRPr/>
+            <a:endParaRPr dirty="0"/>
           </a:p>
         </p:txBody>
       </p:sp>

--- a/template1.pptx
+++ b/template1.pptx
@@ -6837,7 +6837,7 @@
         </p:nvSpPr>
         <p:spPr>
           <a:xfrm>
-            <a:off x="720000" y="445025"/>
+            <a:off x="726775" y="233678"/>
             <a:ext cx="7704000" cy="572700"/>
           </a:xfrm>
           <a:prstGeom prst="rect">
@@ -6860,10 +6860,10 @@
               <a:buNone/>
             </a:pPr>
             <a:r>
-              <a:rPr lang="en" dirty="0"/>
+              <a:rPr lang="en" sz="2800" dirty="0"/>
               <a:t>Demo Page</a:t>
             </a:r>
-            <a:endParaRPr dirty="0"/>
+            <a:endParaRPr sz="2800" dirty="0"/>
           </a:p>
         </p:txBody>
       </p:sp>

--- a/template1.pptx
+++ b/template1.pptx
@@ -4896,7 +4896,7 @@
         </p:nvSpPr>
         <p:spPr>
           <a:xfrm>
-            <a:off x="558022" y="692000"/>
+            <a:off x="260700" y="463300"/>
             <a:ext cx="6176700" cy="3588600"/>
           </a:xfrm>
           <a:prstGeom prst="rect">
@@ -4951,7 +4951,7 @@
           </a:bodyPr>
           <a:lstStyle/>
           <a:p>
-            <a:pPr marL="0" lvl="0" indent="0" algn="ctr" rtl="0">
+            <a:pPr marL="0" lvl="0" indent="0" algn="l" rtl="0">
               <a:spcBef>
                 <a:spcPts val="0"/>
               </a:spcBef>
@@ -6395,226 +6395,6 @@
           <a:chExt cx="0" cy="0"/>
         </a:xfrm>
       </p:grpSpPr>
-      <p:graphicFrame>
-        <p:nvGraphicFramePr>
-          <p:cNvPr id="303" name="Google Shape;303;p33"/>
-          <p:cNvGraphicFramePr/>
-          <p:nvPr>
-            <p:extLst>
-              <p:ext uri="{D42A27DB-BD31-4B8C-83A1-F6EECF244321}">
-                <p14:modId xmlns:p14="http://schemas.microsoft.com/office/powerpoint/2010/main" val="171168238"/>
-              </p:ext>
-            </p:extLst>
-          </p:nvPr>
-        </p:nvGraphicFramePr>
-        <p:xfrm>
-          <a:off x="713225" y="1244409"/>
-          <a:ext cx="7717550" cy="463036"/>
-        </p:xfrm>
-        <a:graphic>
-          <a:graphicData uri="http://schemas.openxmlformats.org/drawingml/2006/table">
-            <a:tbl>
-              <a:tblPr>
-                <a:noFill/>
-                <a:tableStyleId>{FE733ACE-D28B-45FE-A9BC-BD882C99EDB6}</a:tableStyleId>
-              </a:tblPr>
-              <a:tblGrid>
-                <a:gridCol w="2501400">
-                  <a:extLst>
-                    <a:ext uri="{9D8B030D-6E8A-4147-A177-3AD203B41FA5}">
-                      <a16:colId xmlns:a16="http://schemas.microsoft.com/office/drawing/2014/main" val="20000"/>
-                    </a:ext>
-                  </a:extLst>
-                </a:gridCol>
-                <a:gridCol w="5216150">
-                  <a:extLst>
-                    <a:ext uri="{9D8B030D-6E8A-4147-A177-3AD203B41FA5}">
-                      <a16:colId xmlns:a16="http://schemas.microsoft.com/office/drawing/2014/main" val="20001"/>
-                    </a:ext>
-                  </a:extLst>
-                </a:gridCol>
-              </a:tblGrid>
-              <a:tr h="463036">
-                <a:tc>
-                  <a:txBody>
-                    <a:bodyPr/>
-                    <a:lstStyle/>
-                    <a:p>
-                      <a:pPr marL="0" lvl="0" indent="0" algn="r" rtl="0">
-                        <a:spcBef>
-                          <a:spcPts val="0"/>
-                        </a:spcBef>
-                        <a:spcAft>
-                          <a:spcPts val="0"/>
-                        </a:spcAft>
-                        <a:buNone/>
-                      </a:pPr>
-                      <a:r>
-                        <a:rPr lang="en" sz="1100" b="1" dirty="0">
-                          <a:solidFill>
-                            <a:schemeClr val="lt2"/>
-                          </a:solidFill>
-                          <a:uFill>
-                            <a:noFill/>
-                          </a:uFill>
-                          <a:latin typeface="Albert Sans"/>
-                          <a:ea typeface="Albert Sans"/>
-                          <a:cs typeface="Albert Sans"/>
-                          <a:sym typeface="Albert Sans"/>
-                        </a:rPr>
-                        <a:t>Demo H</a:t>
-                      </a:r>
-                      <a:r>
-                        <a:rPr lang="en-GB" sz="1100" b="1" dirty="0" err="1">
-                          <a:solidFill>
-                            <a:schemeClr val="lt2"/>
-                          </a:solidFill>
-                          <a:uFill>
-                            <a:noFill/>
-                          </a:uFill>
-                          <a:latin typeface="Albert Sans"/>
-                          <a:ea typeface="Albert Sans"/>
-                          <a:cs typeface="Albert Sans"/>
-                          <a:sym typeface="Albert Sans"/>
-                        </a:rPr>
-                        <a:t>eading</a:t>
-                      </a:r>
-                      <a:endParaRPr sz="1100" b="1" dirty="0">
-                        <a:solidFill>
-                          <a:schemeClr val="lt2"/>
-                        </a:solidFill>
-                        <a:latin typeface="Albert Sans"/>
-                        <a:ea typeface="Albert Sans"/>
-                        <a:cs typeface="Albert Sans"/>
-                        <a:sym typeface="Albert Sans"/>
-                      </a:endParaRPr>
-                    </a:p>
-                  </a:txBody>
-                  <a:tcPr marL="91425" marR="91425" marT="91425" marB="91425">
-                    <a:lnL w="9525" cap="flat" cmpd="sng">
-                      <a:solidFill>
-                        <a:schemeClr val="lt1"/>
-                      </a:solidFill>
-                      <a:prstDash val="solid"/>
-                      <a:round/>
-                      <a:headEnd type="none" w="sm" len="sm"/>
-                      <a:tailEnd type="none" w="sm" len="sm"/>
-                    </a:lnL>
-                    <a:lnR w="9525" cap="flat" cmpd="sng">
-                      <a:solidFill>
-                        <a:schemeClr val="lt1"/>
-                      </a:solidFill>
-                      <a:prstDash val="solid"/>
-                      <a:round/>
-                      <a:headEnd type="none" w="sm" len="sm"/>
-                      <a:tailEnd type="none" w="sm" len="sm"/>
-                    </a:lnR>
-                    <a:lnT w="9525" cap="flat" cmpd="sng">
-                      <a:solidFill>
-                        <a:schemeClr val="lt1"/>
-                      </a:solidFill>
-                      <a:prstDash val="solid"/>
-                      <a:round/>
-                      <a:headEnd type="none" w="sm" len="sm"/>
-                      <a:tailEnd type="none" w="sm" len="sm"/>
-                    </a:lnT>
-                    <a:lnB w="9525" cap="flat" cmpd="sng">
-                      <a:solidFill>
-                        <a:schemeClr val="lt1"/>
-                      </a:solidFill>
-                      <a:prstDash val="solid"/>
-                      <a:round/>
-                      <a:headEnd type="none" w="sm" len="sm"/>
-                      <a:tailEnd type="none" w="sm" len="sm"/>
-                    </a:lnB>
-                  </a:tcPr>
-                </a:tc>
-                <a:tc>
-                  <a:txBody>
-                    <a:bodyPr/>
-                    <a:lstStyle/>
-                    <a:p>
-                      <a:pPr marL="0" lvl="0" indent="0" algn="l" rtl="0">
-                        <a:spcBef>
-                          <a:spcPts val="0"/>
-                        </a:spcBef>
-                        <a:spcAft>
-                          <a:spcPts val="1600"/>
-                        </a:spcAft>
-                        <a:buNone/>
-                      </a:pPr>
-                      <a:r>
-                        <a:rPr lang="en" sz="1000" dirty="0">
-                          <a:solidFill>
-                            <a:schemeClr val="dk1"/>
-                          </a:solidFill>
-                          <a:latin typeface="Albert Sans"/>
-                          <a:ea typeface="Albert Sans"/>
-                          <a:cs typeface="Albert Sans"/>
-                          <a:sym typeface="Albert Sans"/>
-                        </a:rPr>
-                        <a:t>Demo Body</a:t>
-                      </a:r>
-                      <a:endParaRPr sz="1000" dirty="0">
-                        <a:solidFill>
-                          <a:schemeClr val="dk1"/>
-                        </a:solidFill>
-                        <a:latin typeface="Albert Sans"/>
-                        <a:ea typeface="Albert Sans"/>
-                        <a:cs typeface="Albert Sans"/>
-                        <a:sym typeface="Albert Sans"/>
-                      </a:endParaRPr>
-                    </a:p>
-                  </a:txBody>
-                  <a:tcPr marL="91425" marR="91425" marT="91425" marB="91425">
-                    <a:lnL w="9525" cap="flat" cmpd="sng">
-                      <a:solidFill>
-                        <a:schemeClr val="lt1"/>
-                      </a:solidFill>
-                      <a:prstDash val="solid"/>
-                      <a:round/>
-                      <a:headEnd type="none" w="sm" len="sm"/>
-                      <a:tailEnd type="none" w="sm" len="sm"/>
-                    </a:lnL>
-                    <a:lnR w="9525" cap="flat" cmpd="sng">
-                      <a:solidFill>
-                        <a:schemeClr val="lt1"/>
-                      </a:solidFill>
-                      <a:prstDash val="solid"/>
-                      <a:round/>
-                      <a:headEnd type="none" w="sm" len="sm"/>
-                      <a:tailEnd type="none" w="sm" len="sm"/>
-                    </a:lnR>
-                    <a:lnT w="9525" cap="flat" cmpd="sng">
-                      <a:solidFill>
-                        <a:schemeClr val="lt1"/>
-                      </a:solidFill>
-                      <a:prstDash val="solid"/>
-                      <a:round/>
-                      <a:headEnd type="none" w="sm" len="sm"/>
-                      <a:tailEnd type="none" w="sm" len="sm"/>
-                    </a:lnT>
-                    <a:lnB w="9525" cap="flat" cmpd="sng">
-                      <a:solidFill>
-                        <a:schemeClr val="lt1"/>
-                      </a:solidFill>
-                      <a:prstDash val="solid"/>
-                      <a:round/>
-                      <a:headEnd type="none" w="sm" len="sm"/>
-                      <a:tailEnd type="none" w="sm" len="sm"/>
-                    </a:lnB>
-                  </a:tcPr>
-                </a:tc>
-                <a:extLst>
-                  <a:ext uri="{0D108BD9-81ED-4DB2-BD59-A6C34878D82A}">
-                    <a16:rowId xmlns:a16="http://schemas.microsoft.com/office/drawing/2014/main" val="10000"/>
-                  </a:ext>
-                </a:extLst>
-              </a:tr>
-            </a:tbl>
-          </a:graphicData>
-        </a:graphic>
-      </p:graphicFrame>
       <p:grpSp>
         <p:nvGrpSpPr>
           <p:cNvPr id="306" name="Google Shape;306;p33"/>
@@ -6623,7 +6403,7 @@
         </p:nvGrpSpPr>
         <p:grpSpPr>
           <a:xfrm flipH="1">
-            <a:off x="-311297" y="150024"/>
+            <a:off x="-140916" y="0"/>
             <a:ext cx="1590595" cy="875375"/>
             <a:chOff x="6456464" y="3575600"/>
             <a:chExt cx="1004100" cy="552601"/>
@@ -6728,7 +6508,7 @@
         </p:nvGrpSpPr>
         <p:grpSpPr>
           <a:xfrm flipH="1">
-            <a:off x="-425085" y="1025388"/>
+            <a:off x="-140916" y="4435994"/>
             <a:ext cx="1249832" cy="707506"/>
             <a:chOff x="6456475" y="3575600"/>
             <a:chExt cx="976202" cy="552609"/>
@@ -6837,7 +6617,7 @@
         </p:nvSpPr>
         <p:spPr>
           <a:xfrm>
-            <a:off x="726775" y="233678"/>
+            <a:off x="755169" y="151336"/>
             <a:ext cx="7704000" cy="572700"/>
           </a:xfrm>
           <a:prstGeom prst="rect">
@@ -6864,6 +6644,49 @@
               <a:t>Demo Page</a:t>
             </a:r>
             <a:endParaRPr sz="2800" dirty="0"/>
+          </a:p>
+        </p:txBody>
+      </p:sp>
+      <p:sp>
+        <p:nvSpPr>
+          <p:cNvPr id="2" name="TextBox 1">
+            <a:extLst>
+              <a:ext uri="{FF2B5EF4-FFF2-40B4-BE49-F238E27FC236}">
+                <a16:creationId xmlns:a16="http://schemas.microsoft.com/office/drawing/2014/main" id="{94559E72-DB84-E5C6-656F-C96959A56B45}"/>
+              </a:ext>
+            </a:extLst>
+          </p:cNvPr>
+          <p:cNvSpPr txBox="1"/>
+          <p:nvPr/>
+        </p:nvSpPr>
+        <p:spPr>
+          <a:xfrm>
+            <a:off x="1011975" y="1040054"/>
+            <a:ext cx="7418800" cy="338554"/>
+          </a:xfrm>
+          <a:prstGeom prst="rect">
+            <a:avLst/>
+          </a:prstGeom>
+          <a:noFill/>
+        </p:spPr>
+        <p:txBody>
+          <a:bodyPr wrap="square" rtlCol="0">
+            <a:spAutoFit/>
+          </a:bodyPr>
+          <a:lstStyle/>
+          <a:p>
+            <a:r>
+              <a:rPr lang="en-GB" sz="1600" dirty="0">
+                <a:solidFill>
+                  <a:srgbClr val="191919"/>
+                </a:solidFill>
+                <a:latin typeface="Albert Sans"/>
+                <a:ea typeface="Albert Sans"/>
+                <a:cs typeface="Albert Sans"/>
+                <a:sym typeface="Albert Sans"/>
+              </a:rPr>
+              <a:t>Demo Body</a:t>
+            </a:r>
           </a:p>
         </p:txBody>
       </p:sp>

--- a/template1.pptx
+++ b/template1.pptx
@@ -5,25 +5,20 @@
     <p:sldMasterId id="2147483677" r:id="rId1"/>
   </p:sldMasterIdLst>
   <p:notesMasterIdLst>
-    <p:notesMasterId r:id="rId4"/>
+    <p:notesMasterId r:id="rId3"/>
   </p:notesMasterIdLst>
   <p:sldIdLst>
     <p:sldId id="256" r:id="rId2"/>
-    <p:sldId id="257" r:id="rId3"/>
   </p:sldIdLst>
   <p:sldSz cx="9144000" cy="5143500" type="screen16x9"/>
   <p:notesSz cx="6858000" cy="9144000"/>
   <p:embeddedFontLst>
     <p:embeddedFont>
       <p:font typeface="Albert Sans" panose="020B0604020202020204" charset="0"/>
-      <p:regular r:id="rId5"/>
-      <p:bold r:id="rId6"/>
-      <p:italic r:id="rId7"/>
-      <p:boldItalic r:id="rId8"/>
-    </p:embeddedFont>
-    <p:embeddedFont>
-      <p:font typeface="Nunito Light" pitchFamily="2" charset="0"/>
-      <p:regular r:id="rId9"/>
+      <p:regular r:id="rId4"/>
+      <p:bold r:id="rId5"/>
+      <p:italic r:id="rId6"/>
+      <p:boldItalic r:id="rId7"/>
     </p:embeddedFont>
   </p:embeddedFontLst>
   <p:defaultTextStyle>
@@ -829,110 +824,6 @@
 </p:notes>
 </file>
 
-<file path=ppt/notesSlides/notesSlide2.xml><?xml version="1.0" encoding="utf-8"?>
-<p:notes xmlns:a="http://schemas.openxmlformats.org/drawingml/2006/main" xmlns:r="http://schemas.openxmlformats.org/officeDocument/2006/relationships" xmlns:p="http://schemas.openxmlformats.org/presentationml/2006/main" showMasterSp="0" showMasterPhAnim="0">
-  <p:cSld>
-    <p:spTree>
-      <p:nvGrpSpPr>
-        <p:cNvPr id="1" name="Shape 298"/>
-        <p:cNvGrpSpPr/>
-        <p:nvPr/>
-      </p:nvGrpSpPr>
-      <p:grpSpPr>
-        <a:xfrm>
-          <a:off x="0" y="0"/>
-          <a:ext cx="0" cy="0"/>
-          <a:chOff x="0" y="0"/>
-          <a:chExt cx="0" cy="0"/>
-        </a:xfrm>
-      </p:grpSpPr>
-      <p:sp>
-        <p:nvSpPr>
-          <p:cNvPr id="299" name="Google Shape;299;gd431007ba2_0_208:notes"/>
-          <p:cNvSpPr>
-            <a:spLocks noGrp="1" noRot="1" noChangeAspect="1"/>
-          </p:cNvSpPr>
-          <p:nvPr>
-            <p:ph type="sldImg" idx="2"/>
-          </p:nvPr>
-        </p:nvSpPr>
-        <p:spPr>
-          <a:xfrm>
-            <a:off x="381000" y="685800"/>
-            <a:ext cx="6096000" cy="3429000"/>
-          </a:xfrm>
-          <a:custGeom>
-            <a:avLst/>
-            <a:gdLst/>
-            <a:ahLst/>
-            <a:cxnLst/>
-            <a:rect l="l" t="t" r="r" b="b"/>
-            <a:pathLst>
-              <a:path w="120000" h="120000" extrusionOk="0">
-                <a:moveTo>
-                  <a:pt x="0" y="0"/>
-                </a:moveTo>
-                <a:lnTo>
-                  <a:pt x="120000" y="0"/>
-                </a:lnTo>
-                <a:lnTo>
-                  <a:pt x="120000" y="120000"/>
-                </a:lnTo>
-                <a:lnTo>
-                  <a:pt x="0" y="120000"/>
-                </a:lnTo>
-                <a:close/>
-              </a:path>
-            </a:pathLst>
-          </a:custGeom>
-        </p:spPr>
-      </p:sp>
-      <p:sp>
-        <p:nvSpPr>
-          <p:cNvPr id="300" name="Google Shape;300;gd431007ba2_0_208:notes"/>
-          <p:cNvSpPr txBox="1">
-            <a:spLocks noGrp="1"/>
-          </p:cNvSpPr>
-          <p:nvPr>
-            <p:ph type="body" idx="1"/>
-          </p:nvPr>
-        </p:nvSpPr>
-        <p:spPr>
-          <a:xfrm>
-            <a:off x="685800" y="4343400"/>
-            <a:ext cx="5486400" cy="4114800"/>
-          </a:xfrm>
-          <a:prstGeom prst="rect">
-            <a:avLst/>
-          </a:prstGeom>
-        </p:spPr>
-        <p:txBody>
-          <a:bodyPr spcFirstLastPara="1" wrap="square" lIns="91425" tIns="91425" rIns="91425" bIns="91425" anchor="t" anchorCtr="0">
-            <a:noAutofit/>
-          </a:bodyPr>
-          <a:lstStyle/>
-          <a:p>
-            <a:pPr marL="0" lvl="0" indent="0" algn="l" rtl="0">
-              <a:spcBef>
-                <a:spcPts val="0"/>
-              </a:spcBef>
-              <a:spcAft>
-                <a:spcPts val="0"/>
-              </a:spcAft>
-              <a:buNone/>
-            </a:pPr>
-            <a:endParaRPr/>
-          </a:p>
-        </p:txBody>
-      </p:sp>
-    </p:spTree>
-  </p:cSld>
-  <p:clrMapOvr>
-    <a:masterClrMapping/>
-  </p:clrMapOvr>
-</p:notes>
-</file>
-
 <file path=ppt/slideLayouts/slideLayout1.xml><?xml version="1.0" encoding="utf-8"?>
 <p:sldLayout xmlns:a="http://schemas.openxmlformats.org/drawingml/2006/main" xmlns:r="http://schemas.openxmlformats.org/officeDocument/2006/relationships" xmlns:p="http://schemas.openxmlformats.org/presentationml/2006/main" matchingName="Title slide" type="title">
   <p:cSld name="TITLE">
@@ -1310,1412 +1201,6 @@
 </file>
 
 <file path=ppt/slideLayouts/slideLayout2.xml><?xml version="1.0" encoding="utf-8"?>
-<p:sldLayout xmlns:a="http://schemas.openxmlformats.org/drawingml/2006/main" xmlns:r="http://schemas.openxmlformats.org/officeDocument/2006/relationships" xmlns:p="http://schemas.openxmlformats.org/presentationml/2006/main" matchingName="Title and body" type="tx">
-  <p:cSld name="TITLE_AND_BODY">
-    <p:spTree>
-      <p:nvGrpSpPr>
-        <p:cNvPr id="1" name="Shape 21"/>
-        <p:cNvGrpSpPr/>
-        <p:nvPr/>
-      </p:nvGrpSpPr>
-      <p:grpSpPr>
-        <a:xfrm>
-          <a:off x="0" y="0"/>
-          <a:ext cx="0" cy="0"/>
-          <a:chOff x="0" y="0"/>
-          <a:chExt cx="0" cy="0"/>
-        </a:xfrm>
-      </p:grpSpPr>
-      <p:sp>
-        <p:nvSpPr>
-          <p:cNvPr id="22" name="Google Shape;22;p4"/>
-          <p:cNvSpPr txBox="1">
-            <a:spLocks noGrp="1"/>
-          </p:cNvSpPr>
-          <p:nvPr>
-            <p:ph type="title"/>
-          </p:nvPr>
-        </p:nvSpPr>
-        <p:spPr>
-          <a:xfrm>
-            <a:off x="720000" y="445025"/>
-            <a:ext cx="7704000" cy="572700"/>
-          </a:xfrm>
-          <a:prstGeom prst="rect">
-            <a:avLst/>
-          </a:prstGeom>
-        </p:spPr>
-        <p:txBody>
-          <a:bodyPr spcFirstLastPara="1" wrap="square" lIns="91425" tIns="91425" rIns="91425" bIns="91425" anchor="t" anchorCtr="0">
-            <a:noAutofit/>
-          </a:bodyPr>
-          <a:lstStyle>
-            <a:lvl1pPr lvl="0" algn="ctr" rtl="0">
-              <a:spcBef>
-                <a:spcPts val="0"/>
-              </a:spcBef>
-              <a:spcAft>
-                <a:spcPts val="0"/>
-              </a:spcAft>
-              <a:buSzPts val="3500"/>
-              <a:buNone/>
-              <a:defRPr/>
-            </a:lvl1pPr>
-            <a:lvl2pPr lvl="1" rtl="0">
-              <a:spcBef>
-                <a:spcPts val="0"/>
-              </a:spcBef>
-              <a:spcAft>
-                <a:spcPts val="0"/>
-              </a:spcAft>
-              <a:buSzPts val="3500"/>
-              <a:buNone/>
-              <a:defRPr/>
-            </a:lvl2pPr>
-            <a:lvl3pPr lvl="2" rtl="0">
-              <a:spcBef>
-                <a:spcPts val="0"/>
-              </a:spcBef>
-              <a:spcAft>
-                <a:spcPts val="0"/>
-              </a:spcAft>
-              <a:buSzPts val="3500"/>
-              <a:buNone/>
-              <a:defRPr/>
-            </a:lvl3pPr>
-            <a:lvl4pPr lvl="3" rtl="0">
-              <a:spcBef>
-                <a:spcPts val="0"/>
-              </a:spcBef>
-              <a:spcAft>
-                <a:spcPts val="0"/>
-              </a:spcAft>
-              <a:buSzPts val="3500"/>
-              <a:buNone/>
-              <a:defRPr/>
-            </a:lvl4pPr>
-            <a:lvl5pPr lvl="4" rtl="0">
-              <a:spcBef>
-                <a:spcPts val="0"/>
-              </a:spcBef>
-              <a:spcAft>
-                <a:spcPts val="0"/>
-              </a:spcAft>
-              <a:buSzPts val="3500"/>
-              <a:buNone/>
-              <a:defRPr/>
-            </a:lvl5pPr>
-            <a:lvl6pPr lvl="5" rtl="0">
-              <a:spcBef>
-                <a:spcPts val="0"/>
-              </a:spcBef>
-              <a:spcAft>
-                <a:spcPts val="0"/>
-              </a:spcAft>
-              <a:buSzPts val="3500"/>
-              <a:buNone/>
-              <a:defRPr/>
-            </a:lvl6pPr>
-            <a:lvl7pPr lvl="6" rtl="0">
-              <a:spcBef>
-                <a:spcPts val="0"/>
-              </a:spcBef>
-              <a:spcAft>
-                <a:spcPts val="0"/>
-              </a:spcAft>
-              <a:buSzPts val="3500"/>
-              <a:buNone/>
-              <a:defRPr/>
-            </a:lvl7pPr>
-            <a:lvl8pPr lvl="7" rtl="0">
-              <a:spcBef>
-                <a:spcPts val="0"/>
-              </a:spcBef>
-              <a:spcAft>
-                <a:spcPts val="0"/>
-              </a:spcAft>
-              <a:buSzPts val="3500"/>
-              <a:buNone/>
-              <a:defRPr/>
-            </a:lvl8pPr>
-            <a:lvl9pPr lvl="8" rtl="0">
-              <a:spcBef>
-                <a:spcPts val="0"/>
-              </a:spcBef>
-              <a:spcAft>
-                <a:spcPts val="0"/>
-              </a:spcAft>
-              <a:buSzPts val="3500"/>
-              <a:buNone/>
-              <a:defRPr/>
-            </a:lvl9pPr>
-          </a:lstStyle>
-          <a:p>
-            <a:endParaRPr/>
-          </a:p>
-        </p:txBody>
-      </p:sp>
-      <p:sp>
-        <p:nvSpPr>
-          <p:cNvPr id="23" name="Google Shape;23;p4"/>
-          <p:cNvSpPr txBox="1">
-            <a:spLocks noGrp="1"/>
-          </p:cNvSpPr>
-          <p:nvPr>
-            <p:ph type="body" idx="1"/>
-          </p:nvPr>
-        </p:nvSpPr>
-        <p:spPr>
-          <a:xfrm>
-            <a:off x="720000" y="1269175"/>
-            <a:ext cx="7704000" cy="399000"/>
-          </a:xfrm>
-          <a:prstGeom prst="rect">
-            <a:avLst/>
-          </a:prstGeom>
-        </p:spPr>
-        <p:txBody>
-          <a:bodyPr spcFirstLastPara="1" wrap="square" lIns="91425" tIns="91425" rIns="91425" bIns="91425" anchor="t" anchorCtr="0">
-            <a:noAutofit/>
-          </a:bodyPr>
-          <a:lstStyle>
-            <a:lvl1pPr marL="457200" lvl="0" indent="-317500" algn="ctr" rtl="0">
-              <a:lnSpc>
-                <a:spcPct val="100000"/>
-              </a:lnSpc>
-              <a:spcBef>
-                <a:spcPts val="0"/>
-              </a:spcBef>
-              <a:spcAft>
-                <a:spcPts val="0"/>
-              </a:spcAft>
-              <a:buSzPts val="1400"/>
-              <a:buFont typeface="Nunito Light"/>
-              <a:buChar char="●"/>
-              <a:defRPr sz="1200"/>
-            </a:lvl1pPr>
-            <a:lvl2pPr marL="914400" lvl="1" indent="-317500" rtl="0">
-              <a:lnSpc>
-                <a:spcPct val="100000"/>
-              </a:lnSpc>
-              <a:spcBef>
-                <a:spcPts val="0"/>
-              </a:spcBef>
-              <a:spcAft>
-                <a:spcPts val="0"/>
-              </a:spcAft>
-              <a:buSzPts val="1400"/>
-              <a:buFont typeface="Nunito Light"/>
-              <a:buChar char="○"/>
-              <a:defRPr/>
-            </a:lvl2pPr>
-            <a:lvl3pPr marL="1371600" lvl="2" indent="-317500" rtl="0">
-              <a:lnSpc>
-                <a:spcPct val="100000"/>
-              </a:lnSpc>
-              <a:spcBef>
-                <a:spcPts val="0"/>
-              </a:spcBef>
-              <a:spcAft>
-                <a:spcPts val="0"/>
-              </a:spcAft>
-              <a:buSzPts val="1400"/>
-              <a:buFont typeface="Nunito Light"/>
-              <a:buChar char="■"/>
-              <a:defRPr/>
-            </a:lvl3pPr>
-            <a:lvl4pPr marL="1828800" lvl="3" indent="-317500" rtl="0">
-              <a:lnSpc>
-                <a:spcPct val="100000"/>
-              </a:lnSpc>
-              <a:spcBef>
-                <a:spcPts val="0"/>
-              </a:spcBef>
-              <a:spcAft>
-                <a:spcPts val="0"/>
-              </a:spcAft>
-              <a:buSzPts val="1400"/>
-              <a:buFont typeface="Nunito Light"/>
-              <a:buChar char="●"/>
-              <a:defRPr/>
-            </a:lvl4pPr>
-            <a:lvl5pPr marL="2286000" lvl="4" indent="-317500" rtl="0">
-              <a:lnSpc>
-                <a:spcPct val="100000"/>
-              </a:lnSpc>
-              <a:spcBef>
-                <a:spcPts val="0"/>
-              </a:spcBef>
-              <a:spcAft>
-                <a:spcPts val="0"/>
-              </a:spcAft>
-              <a:buSzPts val="1400"/>
-              <a:buFont typeface="Nunito Light"/>
-              <a:buChar char="○"/>
-              <a:defRPr/>
-            </a:lvl5pPr>
-            <a:lvl6pPr marL="2743200" lvl="5" indent="-317500" rtl="0">
-              <a:lnSpc>
-                <a:spcPct val="100000"/>
-              </a:lnSpc>
-              <a:spcBef>
-                <a:spcPts val="0"/>
-              </a:spcBef>
-              <a:spcAft>
-                <a:spcPts val="0"/>
-              </a:spcAft>
-              <a:buSzPts val="1400"/>
-              <a:buFont typeface="Nunito Light"/>
-              <a:buChar char="■"/>
-              <a:defRPr/>
-            </a:lvl6pPr>
-            <a:lvl7pPr marL="3200400" lvl="6" indent="-317500" rtl="0">
-              <a:lnSpc>
-                <a:spcPct val="100000"/>
-              </a:lnSpc>
-              <a:spcBef>
-                <a:spcPts val="0"/>
-              </a:spcBef>
-              <a:spcAft>
-                <a:spcPts val="0"/>
-              </a:spcAft>
-              <a:buSzPts val="1400"/>
-              <a:buFont typeface="Nunito Light"/>
-              <a:buChar char="●"/>
-              <a:defRPr/>
-            </a:lvl7pPr>
-            <a:lvl8pPr marL="3657600" lvl="7" indent="-317500" rtl="0">
-              <a:lnSpc>
-                <a:spcPct val="100000"/>
-              </a:lnSpc>
-              <a:spcBef>
-                <a:spcPts val="0"/>
-              </a:spcBef>
-              <a:spcAft>
-                <a:spcPts val="0"/>
-              </a:spcAft>
-              <a:buSzPts val="1400"/>
-              <a:buFont typeface="Nunito Light"/>
-              <a:buChar char="○"/>
-              <a:defRPr/>
-            </a:lvl8pPr>
-            <a:lvl9pPr marL="4114800" lvl="8" indent="-317500" rtl="0">
-              <a:lnSpc>
-                <a:spcPct val="100000"/>
-              </a:lnSpc>
-              <a:spcBef>
-                <a:spcPts val="0"/>
-              </a:spcBef>
-              <a:spcAft>
-                <a:spcPts val="0"/>
-              </a:spcAft>
-              <a:buSzPts val="1400"/>
-              <a:buFont typeface="Nunito Light"/>
-              <a:buChar char="■"/>
-              <a:defRPr/>
-            </a:lvl9pPr>
-          </a:lstStyle>
-          <a:p>
-            <a:endParaRPr/>
-          </a:p>
-        </p:txBody>
-      </p:sp>
-      <p:grpSp>
-        <p:nvGrpSpPr>
-          <p:cNvPr id="24" name="Google Shape;24;p4"/>
-          <p:cNvGrpSpPr/>
-          <p:nvPr/>
-        </p:nvGrpSpPr>
-        <p:grpSpPr>
-          <a:xfrm>
-            <a:off x="7845966" y="4050781"/>
-            <a:ext cx="1775083" cy="1748694"/>
-            <a:chOff x="4757800" y="3823757"/>
-            <a:chExt cx="2394232" cy="2358638"/>
-          </a:xfrm>
-        </p:grpSpPr>
-        <p:grpSp>
-          <p:nvGrpSpPr>
-            <p:cNvPr id="25" name="Google Shape;25;p4"/>
-            <p:cNvGrpSpPr/>
-            <p:nvPr/>
-          </p:nvGrpSpPr>
-          <p:grpSpPr>
-            <a:xfrm rot="2700000">
-              <a:off x="4974332" y="4166770"/>
-              <a:ext cx="1045765" cy="1045615"/>
-              <a:chOff x="3741950" y="353925"/>
-              <a:chExt cx="1045775" cy="1045625"/>
-            </a:xfrm>
-          </p:grpSpPr>
-          <p:sp>
-            <p:nvSpPr>
-              <p:cNvPr id="26" name="Google Shape;26;p4"/>
-              <p:cNvSpPr/>
-              <p:nvPr/>
-            </p:nvSpPr>
-            <p:spPr>
-              <a:xfrm>
-                <a:off x="3741950" y="1372675"/>
-                <a:ext cx="26325" cy="26875"/>
-              </a:xfrm>
-              <a:custGeom>
-                <a:avLst/>
-                <a:gdLst/>
-                <a:ahLst/>
-                <a:cxnLst/>
-                <a:rect l="l" t="t" r="r" b="b"/>
-                <a:pathLst>
-                  <a:path w="1053" h="1075" extrusionOk="0">
-                    <a:moveTo>
-                      <a:pt x="526" y="1"/>
-                    </a:moveTo>
-                    <a:cubicBezTo>
-                      <a:pt x="491" y="1"/>
-                      <a:pt x="455" y="8"/>
-                      <a:pt x="427" y="22"/>
-                    </a:cubicBezTo>
-                    <a:cubicBezTo>
-                      <a:pt x="398" y="22"/>
-                      <a:pt x="370" y="22"/>
-                      <a:pt x="313" y="50"/>
-                    </a:cubicBezTo>
-                    <a:cubicBezTo>
-                      <a:pt x="284" y="50"/>
-                      <a:pt x="256" y="79"/>
-                      <a:pt x="228" y="107"/>
-                    </a:cubicBezTo>
-                    <a:cubicBezTo>
-                      <a:pt x="199" y="107"/>
-                      <a:pt x="171" y="136"/>
-                      <a:pt x="142" y="164"/>
-                    </a:cubicBezTo>
-                    <a:cubicBezTo>
-                      <a:pt x="57" y="249"/>
-                      <a:pt x="0" y="392"/>
-                      <a:pt x="0" y="534"/>
-                    </a:cubicBezTo>
-                    <a:cubicBezTo>
-                      <a:pt x="0" y="676"/>
-                      <a:pt x="57" y="818"/>
-                      <a:pt x="142" y="903"/>
-                    </a:cubicBezTo>
-                    <a:cubicBezTo>
-                      <a:pt x="171" y="932"/>
-                      <a:pt x="199" y="960"/>
-                      <a:pt x="228" y="989"/>
-                    </a:cubicBezTo>
-                    <a:cubicBezTo>
-                      <a:pt x="256" y="989"/>
-                      <a:pt x="284" y="1017"/>
-                      <a:pt x="313" y="1046"/>
-                    </a:cubicBezTo>
-                    <a:cubicBezTo>
-                      <a:pt x="370" y="1046"/>
-                      <a:pt x="398" y="1046"/>
-                      <a:pt x="427" y="1074"/>
-                    </a:cubicBezTo>
-                    <a:lnTo>
-                      <a:pt x="626" y="1074"/>
-                    </a:lnTo>
-                    <a:cubicBezTo>
-                      <a:pt x="654" y="1046"/>
-                      <a:pt x="711" y="1046"/>
-                      <a:pt x="739" y="1046"/>
-                    </a:cubicBezTo>
-                    <a:cubicBezTo>
-                      <a:pt x="768" y="1017"/>
-                      <a:pt x="796" y="989"/>
-                      <a:pt x="825" y="989"/>
-                    </a:cubicBezTo>
-                    <a:cubicBezTo>
-                      <a:pt x="853" y="960"/>
-                      <a:pt x="882" y="932"/>
-                      <a:pt x="910" y="903"/>
-                    </a:cubicBezTo>
-                    <a:cubicBezTo>
-                      <a:pt x="938" y="903"/>
-                      <a:pt x="938" y="875"/>
-                      <a:pt x="967" y="847"/>
-                    </a:cubicBezTo>
-                    <a:cubicBezTo>
-                      <a:pt x="995" y="818"/>
-                      <a:pt x="995" y="790"/>
-                      <a:pt x="1024" y="733"/>
-                    </a:cubicBezTo>
-                    <a:cubicBezTo>
-                      <a:pt x="1024" y="704"/>
-                      <a:pt x="1052" y="676"/>
-                      <a:pt x="1052" y="648"/>
-                    </a:cubicBezTo>
-                    <a:cubicBezTo>
-                      <a:pt x="1052" y="619"/>
-                      <a:pt x="1052" y="562"/>
-                      <a:pt x="1052" y="534"/>
-                    </a:cubicBezTo>
-                    <a:cubicBezTo>
-                      <a:pt x="1052" y="392"/>
-                      <a:pt x="995" y="249"/>
-                      <a:pt x="910" y="164"/>
-                    </a:cubicBezTo>
-                    <a:cubicBezTo>
-                      <a:pt x="882" y="136"/>
-                      <a:pt x="853" y="107"/>
-                      <a:pt x="825" y="107"/>
-                    </a:cubicBezTo>
-                    <a:cubicBezTo>
-                      <a:pt x="796" y="79"/>
-                      <a:pt x="768" y="50"/>
-                      <a:pt x="739" y="50"/>
-                    </a:cubicBezTo>
-                    <a:cubicBezTo>
-                      <a:pt x="711" y="22"/>
-                      <a:pt x="654" y="22"/>
-                      <a:pt x="626" y="22"/>
-                    </a:cubicBezTo>
-                    <a:cubicBezTo>
-                      <a:pt x="597" y="8"/>
-                      <a:pt x="562" y="1"/>
-                      <a:pt x="526" y="1"/>
-                    </a:cubicBezTo>
-                    <a:close/>
-                  </a:path>
-                </a:pathLst>
-              </a:custGeom>
-              <a:solidFill>
-                <a:schemeClr val="accent3"/>
-              </a:solidFill>
-              <a:ln>
-                <a:noFill/>
-              </a:ln>
-            </p:spPr>
-            <p:txBody>
-              <a:bodyPr spcFirstLastPara="1" wrap="square" lIns="91425" tIns="91425" rIns="91425" bIns="91425" anchor="ctr" anchorCtr="0">
-                <a:noAutofit/>
-              </a:bodyPr>
-              <a:lstStyle/>
-              <a:p>
-                <a:pPr marL="0" lvl="0" indent="0" algn="l" rtl="0">
-                  <a:spcBef>
-                    <a:spcPts val="0"/>
-                  </a:spcBef>
-                  <a:spcAft>
-                    <a:spcPts val="0"/>
-                  </a:spcAft>
-                  <a:buNone/>
-                </a:pPr>
-                <a:endParaRPr/>
-              </a:p>
-            </p:txBody>
-          </p:sp>
-          <p:sp>
-            <p:nvSpPr>
-              <p:cNvPr id="27" name="Google Shape;27;p4"/>
-              <p:cNvSpPr/>
-              <p:nvPr/>
-            </p:nvSpPr>
-            <p:spPr>
-              <a:xfrm>
-                <a:off x="3804500" y="417550"/>
-                <a:ext cx="920650" cy="918000"/>
-              </a:xfrm>
-              <a:custGeom>
-                <a:avLst/>
-                <a:gdLst/>
-                <a:ahLst/>
-                <a:cxnLst/>
-                <a:rect l="l" t="t" r="r" b="b"/>
-                <a:pathLst>
-                  <a:path w="36826" h="36720" extrusionOk="0">
-                    <a:moveTo>
-                      <a:pt x="36232" y="1"/>
-                    </a:moveTo>
-                    <a:cubicBezTo>
-                      <a:pt x="36094" y="1"/>
-                      <a:pt x="35959" y="51"/>
-                      <a:pt x="35859" y="150"/>
-                    </a:cubicBezTo>
-                    <a:cubicBezTo>
-                      <a:pt x="35660" y="378"/>
-                      <a:pt x="35660" y="690"/>
-                      <a:pt x="35859" y="918"/>
-                    </a:cubicBezTo>
-                    <a:cubicBezTo>
-                      <a:pt x="35973" y="1003"/>
-                      <a:pt x="36115" y="1060"/>
-                      <a:pt x="36229" y="1060"/>
-                    </a:cubicBezTo>
-                    <a:cubicBezTo>
-                      <a:pt x="36371" y="1060"/>
-                      <a:pt x="36513" y="1003"/>
-                      <a:pt x="36627" y="918"/>
-                    </a:cubicBezTo>
-                    <a:cubicBezTo>
-                      <a:pt x="36826" y="690"/>
-                      <a:pt x="36826" y="378"/>
-                      <a:pt x="36627" y="150"/>
-                    </a:cubicBezTo>
-                    <a:cubicBezTo>
-                      <a:pt x="36513" y="51"/>
-                      <a:pt x="36371" y="1"/>
-                      <a:pt x="36232" y="1"/>
-                    </a:cubicBezTo>
-                    <a:close/>
-                    <a:moveTo>
-                      <a:pt x="33694" y="2560"/>
-                    </a:moveTo>
-                    <a:cubicBezTo>
-                      <a:pt x="33556" y="2560"/>
-                      <a:pt x="33414" y="2610"/>
-                      <a:pt x="33300" y="2709"/>
-                    </a:cubicBezTo>
-                    <a:cubicBezTo>
-                      <a:pt x="33101" y="2909"/>
-                      <a:pt x="33101" y="3250"/>
-                      <a:pt x="33300" y="3449"/>
-                    </a:cubicBezTo>
-                    <a:cubicBezTo>
-                      <a:pt x="33414" y="3563"/>
-                      <a:pt x="33556" y="3619"/>
-                      <a:pt x="33698" y="3619"/>
-                    </a:cubicBezTo>
-                    <a:cubicBezTo>
-                      <a:pt x="33840" y="3619"/>
-                      <a:pt x="33954" y="3563"/>
-                      <a:pt x="34068" y="3449"/>
-                    </a:cubicBezTo>
-                    <a:cubicBezTo>
-                      <a:pt x="34267" y="3250"/>
-                      <a:pt x="34267" y="2909"/>
-                      <a:pt x="34068" y="2709"/>
-                    </a:cubicBezTo>
-                    <a:cubicBezTo>
-                      <a:pt x="33968" y="2610"/>
-                      <a:pt x="33833" y="2560"/>
-                      <a:pt x="33694" y="2560"/>
-                    </a:cubicBezTo>
-                    <a:close/>
-                    <a:moveTo>
-                      <a:pt x="31139" y="5091"/>
-                    </a:moveTo>
-                    <a:cubicBezTo>
-                      <a:pt x="31004" y="5091"/>
-                      <a:pt x="30869" y="5141"/>
-                      <a:pt x="30769" y="5240"/>
-                    </a:cubicBezTo>
-                    <a:cubicBezTo>
-                      <a:pt x="30570" y="5468"/>
-                      <a:pt x="30570" y="5809"/>
-                      <a:pt x="30769" y="6008"/>
-                    </a:cubicBezTo>
-                    <a:cubicBezTo>
-                      <a:pt x="30883" y="6122"/>
-                      <a:pt x="30996" y="6150"/>
-                      <a:pt x="31139" y="6150"/>
-                    </a:cubicBezTo>
-                    <a:cubicBezTo>
-                      <a:pt x="31281" y="6150"/>
-                      <a:pt x="31423" y="6122"/>
-                      <a:pt x="31508" y="6008"/>
-                    </a:cubicBezTo>
-                    <a:cubicBezTo>
-                      <a:pt x="31736" y="5809"/>
-                      <a:pt x="31736" y="5468"/>
-                      <a:pt x="31508" y="5240"/>
-                    </a:cubicBezTo>
-                    <a:cubicBezTo>
-                      <a:pt x="31409" y="5141"/>
-                      <a:pt x="31274" y="5091"/>
-                      <a:pt x="31139" y="5091"/>
-                    </a:cubicBezTo>
-                    <a:close/>
-                    <a:moveTo>
-                      <a:pt x="28594" y="7650"/>
-                    </a:moveTo>
-                    <a:cubicBezTo>
-                      <a:pt x="28458" y="7650"/>
-                      <a:pt x="28323" y="7700"/>
-                      <a:pt x="28210" y="7800"/>
-                    </a:cubicBezTo>
-                    <a:cubicBezTo>
-                      <a:pt x="28011" y="7999"/>
-                      <a:pt x="28011" y="8340"/>
-                      <a:pt x="28210" y="8567"/>
-                    </a:cubicBezTo>
-                    <a:cubicBezTo>
-                      <a:pt x="28323" y="8653"/>
-                      <a:pt x="28466" y="8710"/>
-                      <a:pt x="28608" y="8710"/>
-                    </a:cubicBezTo>
-                    <a:cubicBezTo>
-                      <a:pt x="28722" y="8710"/>
-                      <a:pt x="28864" y="8653"/>
-                      <a:pt x="28977" y="8567"/>
-                    </a:cubicBezTo>
-                    <a:cubicBezTo>
-                      <a:pt x="29177" y="8340"/>
-                      <a:pt x="29177" y="7999"/>
-                      <a:pt x="28977" y="7800"/>
-                    </a:cubicBezTo>
-                    <a:cubicBezTo>
-                      <a:pt x="28864" y="7700"/>
-                      <a:pt x="28729" y="7650"/>
-                      <a:pt x="28594" y="7650"/>
-                    </a:cubicBezTo>
-                    <a:close/>
-                    <a:moveTo>
-                      <a:pt x="26048" y="10188"/>
-                    </a:moveTo>
-                    <a:cubicBezTo>
-                      <a:pt x="25913" y="10188"/>
-                      <a:pt x="25778" y="10245"/>
-                      <a:pt x="25679" y="10359"/>
-                    </a:cubicBezTo>
-                    <a:cubicBezTo>
-                      <a:pt x="25451" y="10558"/>
-                      <a:pt x="25451" y="10899"/>
-                      <a:pt x="25679" y="11098"/>
-                    </a:cubicBezTo>
-                    <a:cubicBezTo>
-                      <a:pt x="25764" y="11212"/>
-                      <a:pt x="25906" y="11269"/>
-                      <a:pt x="26048" y="11269"/>
-                    </a:cubicBezTo>
-                    <a:cubicBezTo>
-                      <a:pt x="26191" y="11269"/>
-                      <a:pt x="26333" y="11212"/>
-                      <a:pt x="26418" y="11098"/>
-                    </a:cubicBezTo>
-                    <a:cubicBezTo>
-                      <a:pt x="26646" y="10899"/>
-                      <a:pt x="26646" y="10558"/>
-                      <a:pt x="26418" y="10359"/>
-                    </a:cubicBezTo>
-                    <a:cubicBezTo>
-                      <a:pt x="26319" y="10245"/>
-                      <a:pt x="26184" y="10188"/>
-                      <a:pt x="26048" y="10188"/>
-                    </a:cubicBezTo>
-                    <a:close/>
-                    <a:moveTo>
-                      <a:pt x="23493" y="12741"/>
-                    </a:moveTo>
-                    <a:cubicBezTo>
-                      <a:pt x="23354" y="12741"/>
-                      <a:pt x="23219" y="12790"/>
-                      <a:pt x="23120" y="12890"/>
-                    </a:cubicBezTo>
-                    <a:cubicBezTo>
-                      <a:pt x="22920" y="13089"/>
-                      <a:pt x="22920" y="13430"/>
-                      <a:pt x="23120" y="13658"/>
-                    </a:cubicBezTo>
-                    <a:cubicBezTo>
-                      <a:pt x="23233" y="13743"/>
-                      <a:pt x="23375" y="13800"/>
-                      <a:pt x="23489" y="13800"/>
-                    </a:cubicBezTo>
-                    <a:cubicBezTo>
-                      <a:pt x="23631" y="13800"/>
-                      <a:pt x="23774" y="13743"/>
-                      <a:pt x="23887" y="13658"/>
-                    </a:cubicBezTo>
-                    <a:cubicBezTo>
-                      <a:pt x="24086" y="13430"/>
-                      <a:pt x="24086" y="13089"/>
-                      <a:pt x="23887" y="12890"/>
-                    </a:cubicBezTo>
-                    <a:cubicBezTo>
-                      <a:pt x="23774" y="12790"/>
-                      <a:pt x="23631" y="12741"/>
-                      <a:pt x="23493" y="12741"/>
-                    </a:cubicBezTo>
-                    <a:close/>
-                    <a:moveTo>
-                      <a:pt x="20958" y="15278"/>
-                    </a:moveTo>
-                    <a:cubicBezTo>
-                      <a:pt x="20823" y="15278"/>
-                      <a:pt x="20688" y="15335"/>
-                      <a:pt x="20589" y="15449"/>
-                    </a:cubicBezTo>
-                    <a:cubicBezTo>
-                      <a:pt x="20361" y="15648"/>
-                      <a:pt x="20361" y="15989"/>
-                      <a:pt x="20589" y="16188"/>
-                    </a:cubicBezTo>
-                    <a:cubicBezTo>
-                      <a:pt x="20674" y="16302"/>
-                      <a:pt x="20816" y="16359"/>
-                      <a:pt x="20958" y="16359"/>
-                    </a:cubicBezTo>
-                    <a:cubicBezTo>
-                      <a:pt x="21101" y="16359"/>
-                      <a:pt x="21214" y="16302"/>
-                      <a:pt x="21328" y="16188"/>
-                    </a:cubicBezTo>
-                    <a:cubicBezTo>
-                      <a:pt x="21527" y="15989"/>
-                      <a:pt x="21527" y="15648"/>
-                      <a:pt x="21328" y="15449"/>
-                    </a:cubicBezTo>
-                    <a:cubicBezTo>
-                      <a:pt x="21228" y="15335"/>
-                      <a:pt x="21093" y="15278"/>
-                      <a:pt x="20958" y="15278"/>
-                    </a:cubicBezTo>
-                    <a:close/>
-                    <a:moveTo>
-                      <a:pt x="18399" y="17831"/>
-                    </a:moveTo>
-                    <a:cubicBezTo>
-                      <a:pt x="18264" y="17831"/>
-                      <a:pt x="18129" y="17880"/>
-                      <a:pt x="18029" y="17980"/>
-                    </a:cubicBezTo>
-                    <a:cubicBezTo>
-                      <a:pt x="17830" y="18207"/>
-                      <a:pt x="17830" y="18549"/>
-                      <a:pt x="18029" y="18748"/>
-                    </a:cubicBezTo>
-                    <a:cubicBezTo>
-                      <a:pt x="18143" y="18833"/>
-                      <a:pt x="18257" y="18890"/>
-                      <a:pt x="18399" y="18890"/>
-                    </a:cubicBezTo>
-                    <a:cubicBezTo>
-                      <a:pt x="18541" y="18890"/>
-                      <a:pt x="18683" y="18833"/>
-                      <a:pt x="18769" y="18748"/>
-                    </a:cubicBezTo>
-                    <a:cubicBezTo>
-                      <a:pt x="18996" y="18549"/>
-                      <a:pt x="18996" y="18207"/>
-                      <a:pt x="18769" y="17980"/>
-                    </a:cubicBezTo>
-                    <a:cubicBezTo>
-                      <a:pt x="18669" y="17880"/>
-                      <a:pt x="18534" y="17831"/>
-                      <a:pt x="18399" y="17831"/>
-                    </a:cubicBezTo>
-                    <a:close/>
-                    <a:moveTo>
-                      <a:pt x="15865" y="20390"/>
-                    </a:moveTo>
-                    <a:cubicBezTo>
-                      <a:pt x="15726" y="20390"/>
-                      <a:pt x="15584" y="20440"/>
-                      <a:pt x="15470" y="20539"/>
-                    </a:cubicBezTo>
-                    <a:cubicBezTo>
-                      <a:pt x="15271" y="20738"/>
-                      <a:pt x="15271" y="21080"/>
-                      <a:pt x="15470" y="21279"/>
-                    </a:cubicBezTo>
-                    <a:cubicBezTo>
-                      <a:pt x="15584" y="21392"/>
-                      <a:pt x="15726" y="21449"/>
-                      <a:pt x="15868" y="21449"/>
-                    </a:cubicBezTo>
-                    <a:cubicBezTo>
-                      <a:pt x="15982" y="21449"/>
-                      <a:pt x="16124" y="21392"/>
-                      <a:pt x="16238" y="21279"/>
-                    </a:cubicBezTo>
-                    <a:cubicBezTo>
-                      <a:pt x="16437" y="21080"/>
-                      <a:pt x="16437" y="20738"/>
-                      <a:pt x="16238" y="20539"/>
-                    </a:cubicBezTo>
-                    <a:cubicBezTo>
-                      <a:pt x="16138" y="20440"/>
-                      <a:pt x="16003" y="20390"/>
-                      <a:pt x="15865" y="20390"/>
-                    </a:cubicBezTo>
-                    <a:close/>
-                    <a:moveTo>
-                      <a:pt x="13309" y="22921"/>
-                    </a:moveTo>
-                    <a:cubicBezTo>
-                      <a:pt x="13174" y="22921"/>
-                      <a:pt x="13039" y="22971"/>
-                      <a:pt x="12939" y="23070"/>
-                    </a:cubicBezTo>
-                    <a:cubicBezTo>
-                      <a:pt x="12712" y="23298"/>
-                      <a:pt x="12712" y="23639"/>
-                      <a:pt x="12939" y="23838"/>
-                    </a:cubicBezTo>
-                    <a:cubicBezTo>
-                      <a:pt x="13025" y="23952"/>
-                      <a:pt x="13167" y="23980"/>
-                      <a:pt x="13309" y="23980"/>
-                    </a:cubicBezTo>
-                    <a:cubicBezTo>
-                      <a:pt x="13451" y="23980"/>
-                      <a:pt x="13593" y="23952"/>
-                      <a:pt x="13679" y="23838"/>
-                    </a:cubicBezTo>
-                    <a:cubicBezTo>
-                      <a:pt x="13906" y="23639"/>
-                      <a:pt x="13906" y="23298"/>
-                      <a:pt x="13679" y="23070"/>
-                    </a:cubicBezTo>
-                    <a:cubicBezTo>
-                      <a:pt x="13579" y="22971"/>
-                      <a:pt x="13444" y="22921"/>
-                      <a:pt x="13309" y="22921"/>
-                    </a:cubicBezTo>
-                    <a:close/>
-                    <a:moveTo>
-                      <a:pt x="10764" y="25480"/>
-                    </a:moveTo>
-                    <a:cubicBezTo>
-                      <a:pt x="10629" y="25480"/>
-                      <a:pt x="10494" y="25530"/>
-                      <a:pt x="10380" y="25629"/>
-                    </a:cubicBezTo>
-                    <a:cubicBezTo>
-                      <a:pt x="10181" y="25829"/>
-                      <a:pt x="10181" y="26170"/>
-                      <a:pt x="10380" y="26397"/>
-                    </a:cubicBezTo>
-                    <a:cubicBezTo>
-                      <a:pt x="10494" y="26483"/>
-                      <a:pt x="10636" y="26539"/>
-                      <a:pt x="10778" y="26539"/>
-                    </a:cubicBezTo>
-                    <a:cubicBezTo>
-                      <a:pt x="10892" y="26539"/>
-                      <a:pt x="11034" y="26483"/>
-                      <a:pt x="11148" y="26397"/>
-                    </a:cubicBezTo>
-                    <a:cubicBezTo>
-                      <a:pt x="11347" y="26170"/>
-                      <a:pt x="11347" y="25829"/>
-                      <a:pt x="11148" y="25629"/>
-                    </a:cubicBezTo>
-                    <a:cubicBezTo>
-                      <a:pt x="11034" y="25530"/>
-                      <a:pt x="10899" y="25480"/>
-                      <a:pt x="10764" y="25480"/>
-                    </a:cubicBezTo>
-                    <a:close/>
-                    <a:moveTo>
-                      <a:pt x="8219" y="28018"/>
-                    </a:moveTo>
-                    <a:cubicBezTo>
-                      <a:pt x="8084" y="28018"/>
-                      <a:pt x="7949" y="28075"/>
-                      <a:pt x="7849" y="28189"/>
-                    </a:cubicBezTo>
-                    <a:cubicBezTo>
-                      <a:pt x="7622" y="28388"/>
-                      <a:pt x="7622" y="28729"/>
-                      <a:pt x="7849" y="28928"/>
-                    </a:cubicBezTo>
-                    <a:cubicBezTo>
-                      <a:pt x="7934" y="29042"/>
-                      <a:pt x="8077" y="29099"/>
-                      <a:pt x="8219" y="29099"/>
-                    </a:cubicBezTo>
-                    <a:cubicBezTo>
-                      <a:pt x="8361" y="29099"/>
-                      <a:pt x="8475" y="29042"/>
-                      <a:pt x="8588" y="28928"/>
-                    </a:cubicBezTo>
-                    <a:cubicBezTo>
-                      <a:pt x="8787" y="28729"/>
-                      <a:pt x="8787" y="28388"/>
-                      <a:pt x="8588" y="28189"/>
-                    </a:cubicBezTo>
-                    <a:cubicBezTo>
-                      <a:pt x="8489" y="28075"/>
-                      <a:pt x="8354" y="28018"/>
-                      <a:pt x="8219" y="28018"/>
-                    </a:cubicBezTo>
-                    <a:close/>
-                    <a:moveTo>
-                      <a:pt x="5663" y="30570"/>
-                    </a:moveTo>
-                    <a:cubicBezTo>
-                      <a:pt x="5524" y="30570"/>
-                      <a:pt x="5389" y="30620"/>
-                      <a:pt x="5290" y="30720"/>
-                    </a:cubicBezTo>
-                    <a:cubicBezTo>
-                      <a:pt x="5091" y="30947"/>
-                      <a:pt x="5091" y="31260"/>
-                      <a:pt x="5290" y="31487"/>
-                    </a:cubicBezTo>
-                    <a:cubicBezTo>
-                      <a:pt x="5403" y="31573"/>
-                      <a:pt x="5546" y="31630"/>
-                      <a:pt x="5659" y="31630"/>
-                    </a:cubicBezTo>
-                    <a:cubicBezTo>
-                      <a:pt x="5802" y="31630"/>
-                      <a:pt x="5944" y="31573"/>
-                      <a:pt x="6058" y="31487"/>
-                    </a:cubicBezTo>
-                    <a:cubicBezTo>
-                      <a:pt x="6257" y="31260"/>
-                      <a:pt x="6257" y="30947"/>
-                      <a:pt x="6058" y="30720"/>
-                    </a:cubicBezTo>
-                    <a:cubicBezTo>
-                      <a:pt x="5944" y="30620"/>
-                      <a:pt x="5802" y="30570"/>
-                      <a:pt x="5663" y="30570"/>
-                    </a:cubicBezTo>
-                    <a:close/>
-                    <a:moveTo>
-                      <a:pt x="3125" y="33108"/>
-                    </a:moveTo>
-                    <a:cubicBezTo>
-                      <a:pt x="2986" y="33108"/>
-                      <a:pt x="2844" y="33165"/>
-                      <a:pt x="2730" y="33279"/>
-                    </a:cubicBezTo>
-                    <a:cubicBezTo>
-                      <a:pt x="2531" y="33478"/>
-                      <a:pt x="2531" y="33819"/>
-                      <a:pt x="2730" y="34018"/>
-                    </a:cubicBezTo>
-                    <a:cubicBezTo>
-                      <a:pt x="2844" y="34132"/>
-                      <a:pt x="2986" y="34189"/>
-                      <a:pt x="3129" y="34189"/>
-                    </a:cubicBezTo>
-                    <a:cubicBezTo>
-                      <a:pt x="3242" y="34189"/>
-                      <a:pt x="3384" y="34132"/>
-                      <a:pt x="3498" y="34018"/>
-                    </a:cubicBezTo>
-                    <a:cubicBezTo>
-                      <a:pt x="3697" y="33819"/>
-                      <a:pt x="3697" y="33478"/>
-                      <a:pt x="3498" y="33279"/>
-                    </a:cubicBezTo>
-                    <a:cubicBezTo>
-                      <a:pt x="3399" y="33165"/>
-                      <a:pt x="3264" y="33108"/>
-                      <a:pt x="3125" y="33108"/>
-                    </a:cubicBezTo>
-                    <a:close/>
-                    <a:moveTo>
-                      <a:pt x="569" y="35660"/>
-                    </a:moveTo>
-                    <a:cubicBezTo>
-                      <a:pt x="434" y="35660"/>
-                      <a:pt x="299" y="35710"/>
-                      <a:pt x="200" y="35810"/>
-                    </a:cubicBezTo>
-                    <a:cubicBezTo>
-                      <a:pt x="1" y="36037"/>
-                      <a:pt x="1" y="36379"/>
-                      <a:pt x="200" y="36578"/>
-                    </a:cubicBezTo>
-                    <a:cubicBezTo>
-                      <a:pt x="313" y="36691"/>
-                      <a:pt x="427" y="36720"/>
-                      <a:pt x="569" y="36720"/>
-                    </a:cubicBezTo>
-                    <a:cubicBezTo>
-                      <a:pt x="711" y="36720"/>
-                      <a:pt x="854" y="36691"/>
-                      <a:pt x="939" y="36578"/>
-                    </a:cubicBezTo>
-                    <a:cubicBezTo>
-                      <a:pt x="1166" y="36379"/>
-                      <a:pt x="1166" y="36037"/>
-                      <a:pt x="939" y="35810"/>
-                    </a:cubicBezTo>
-                    <a:cubicBezTo>
-                      <a:pt x="839" y="35710"/>
-                      <a:pt x="704" y="35660"/>
-                      <a:pt x="569" y="35660"/>
-                    </a:cubicBezTo>
-                    <a:close/>
-                  </a:path>
-                </a:pathLst>
-              </a:custGeom>
-              <a:solidFill>
-                <a:schemeClr val="accent3"/>
-              </a:solidFill>
-              <a:ln>
-                <a:noFill/>
-              </a:ln>
-            </p:spPr>
-            <p:txBody>
-              <a:bodyPr spcFirstLastPara="1" wrap="square" lIns="91425" tIns="91425" rIns="91425" bIns="91425" anchor="ctr" anchorCtr="0">
-                <a:noAutofit/>
-              </a:bodyPr>
-              <a:lstStyle/>
-              <a:p>
-                <a:pPr marL="0" lvl="0" indent="0" algn="l" rtl="0">
-                  <a:spcBef>
-                    <a:spcPts val="0"/>
-                  </a:spcBef>
-                  <a:spcAft>
-                    <a:spcPts val="0"/>
-                  </a:spcAft>
-                  <a:buNone/>
-                </a:pPr>
-                <a:endParaRPr/>
-              </a:p>
-            </p:txBody>
-          </p:sp>
-          <p:sp>
-            <p:nvSpPr>
-              <p:cNvPr id="28" name="Google Shape;28;p4"/>
-              <p:cNvSpPr/>
-              <p:nvPr/>
-            </p:nvSpPr>
-            <p:spPr>
-              <a:xfrm>
-                <a:off x="4760675" y="353925"/>
-                <a:ext cx="27050" cy="26875"/>
-              </a:xfrm>
-              <a:custGeom>
-                <a:avLst/>
-                <a:gdLst/>
-                <a:ahLst/>
-                <a:cxnLst/>
-                <a:rect l="l" t="t" r="r" b="b"/>
-                <a:pathLst>
-                  <a:path w="1082" h="1075" extrusionOk="0">
-                    <a:moveTo>
-                      <a:pt x="563" y="0"/>
-                    </a:moveTo>
-                    <a:cubicBezTo>
-                      <a:pt x="517" y="0"/>
-                      <a:pt x="471" y="7"/>
-                      <a:pt x="427" y="22"/>
-                    </a:cubicBezTo>
-                    <a:cubicBezTo>
-                      <a:pt x="399" y="22"/>
-                      <a:pt x="370" y="22"/>
-                      <a:pt x="342" y="51"/>
-                    </a:cubicBezTo>
-                    <a:cubicBezTo>
-                      <a:pt x="314" y="51"/>
-                      <a:pt x="285" y="79"/>
-                      <a:pt x="228" y="79"/>
-                    </a:cubicBezTo>
-                    <a:cubicBezTo>
-                      <a:pt x="200" y="107"/>
-                      <a:pt x="200" y="136"/>
-                      <a:pt x="171" y="164"/>
-                    </a:cubicBezTo>
-                    <a:cubicBezTo>
-                      <a:pt x="143" y="193"/>
-                      <a:pt x="115" y="193"/>
-                      <a:pt x="86" y="250"/>
-                    </a:cubicBezTo>
-                    <a:cubicBezTo>
-                      <a:pt x="86" y="278"/>
-                      <a:pt x="58" y="306"/>
-                      <a:pt x="58" y="335"/>
-                    </a:cubicBezTo>
-                    <a:cubicBezTo>
-                      <a:pt x="29" y="363"/>
-                      <a:pt x="29" y="392"/>
-                      <a:pt x="29" y="420"/>
-                    </a:cubicBezTo>
-                    <a:cubicBezTo>
-                      <a:pt x="1" y="449"/>
-                      <a:pt x="1" y="506"/>
-                      <a:pt x="1" y="534"/>
-                    </a:cubicBezTo>
-                    <a:cubicBezTo>
-                      <a:pt x="1" y="562"/>
-                      <a:pt x="1" y="591"/>
-                      <a:pt x="29" y="648"/>
-                    </a:cubicBezTo>
-                    <a:cubicBezTo>
-                      <a:pt x="29" y="676"/>
-                      <a:pt x="29" y="705"/>
-                      <a:pt x="58" y="733"/>
-                    </a:cubicBezTo>
-                    <a:cubicBezTo>
-                      <a:pt x="58" y="761"/>
-                      <a:pt x="86" y="790"/>
-                      <a:pt x="86" y="818"/>
-                    </a:cubicBezTo>
-                    <a:cubicBezTo>
-                      <a:pt x="115" y="847"/>
-                      <a:pt x="143" y="875"/>
-                      <a:pt x="171" y="904"/>
-                    </a:cubicBezTo>
-                    <a:cubicBezTo>
-                      <a:pt x="200" y="932"/>
-                      <a:pt x="200" y="961"/>
-                      <a:pt x="228" y="989"/>
-                    </a:cubicBezTo>
-                    <a:cubicBezTo>
-                      <a:pt x="285" y="989"/>
-                      <a:pt x="314" y="1017"/>
-                      <a:pt x="342" y="1017"/>
-                    </a:cubicBezTo>
-                    <a:cubicBezTo>
-                      <a:pt x="370" y="1046"/>
-                      <a:pt x="399" y="1046"/>
-                      <a:pt x="427" y="1046"/>
-                    </a:cubicBezTo>
-                    <a:cubicBezTo>
-                      <a:pt x="456" y="1074"/>
-                      <a:pt x="513" y="1074"/>
-                      <a:pt x="541" y="1074"/>
-                    </a:cubicBezTo>
-                    <a:cubicBezTo>
-                      <a:pt x="683" y="1074"/>
-                      <a:pt x="825" y="1017"/>
-                      <a:pt x="911" y="904"/>
-                    </a:cubicBezTo>
-                    <a:cubicBezTo>
-                      <a:pt x="939" y="875"/>
-                      <a:pt x="968" y="847"/>
-                      <a:pt x="996" y="818"/>
-                    </a:cubicBezTo>
-                    <a:cubicBezTo>
-                      <a:pt x="996" y="790"/>
-                      <a:pt x="1025" y="761"/>
-                      <a:pt x="1025" y="733"/>
-                    </a:cubicBezTo>
-                    <a:cubicBezTo>
-                      <a:pt x="1053" y="705"/>
-                      <a:pt x="1053" y="676"/>
-                      <a:pt x="1053" y="648"/>
-                    </a:cubicBezTo>
-                    <a:cubicBezTo>
-                      <a:pt x="1081" y="591"/>
-                      <a:pt x="1081" y="562"/>
-                      <a:pt x="1081" y="534"/>
-                    </a:cubicBezTo>
-                    <a:cubicBezTo>
-                      <a:pt x="1081" y="506"/>
-                      <a:pt x="1053" y="449"/>
-                      <a:pt x="1053" y="420"/>
-                    </a:cubicBezTo>
-                    <a:cubicBezTo>
-                      <a:pt x="1053" y="392"/>
-                      <a:pt x="1053" y="363"/>
-                      <a:pt x="1025" y="335"/>
-                    </a:cubicBezTo>
-                    <a:cubicBezTo>
-                      <a:pt x="1025" y="306"/>
-                      <a:pt x="996" y="278"/>
-                      <a:pt x="996" y="250"/>
-                    </a:cubicBezTo>
-                    <a:cubicBezTo>
-                      <a:pt x="968" y="193"/>
-                      <a:pt x="939" y="193"/>
-                      <a:pt x="911" y="164"/>
-                    </a:cubicBezTo>
-                    <a:cubicBezTo>
-                      <a:pt x="826" y="59"/>
-                      <a:pt x="695" y="0"/>
-                      <a:pt x="563" y="0"/>
-                    </a:cubicBezTo>
-                    <a:close/>
-                  </a:path>
-                </a:pathLst>
-              </a:custGeom>
-              <a:solidFill>
-                <a:schemeClr val="accent3"/>
-              </a:solidFill>
-              <a:ln>
-                <a:noFill/>
-              </a:ln>
-            </p:spPr>
-            <p:txBody>
-              <a:bodyPr spcFirstLastPara="1" wrap="square" lIns="91425" tIns="91425" rIns="91425" bIns="91425" anchor="ctr" anchorCtr="0">
-                <a:noAutofit/>
-              </a:bodyPr>
-              <a:lstStyle/>
-              <a:p>
-                <a:pPr marL="0" lvl="0" indent="0" algn="l" rtl="0">
-                  <a:spcBef>
-                    <a:spcPts val="0"/>
-                  </a:spcBef>
-                  <a:spcAft>
-                    <a:spcPts val="0"/>
-                  </a:spcAft>
-                  <a:buNone/>
-                </a:pPr>
-                <a:endParaRPr/>
-              </a:p>
-            </p:txBody>
-          </p:sp>
-        </p:grpSp>
-        <p:sp>
-          <p:nvSpPr>
-            <p:cNvPr id="29" name="Google Shape;29;p4"/>
-            <p:cNvSpPr/>
-            <p:nvPr/>
-          </p:nvSpPr>
-          <p:spPr>
-            <a:xfrm rot="2700000">
-              <a:off x="5143783" y="4164197"/>
-              <a:ext cx="1657859" cy="1677759"/>
-            </a:xfrm>
-            <a:custGeom>
-              <a:avLst/>
-              <a:gdLst/>
-              <a:ahLst/>
-              <a:cxnLst/>
-              <a:rect l="l" t="t" r="r" b="b"/>
-              <a:pathLst>
-                <a:path w="66315" h="67111" extrusionOk="0">
-                  <a:moveTo>
-                    <a:pt x="8446" y="67111"/>
-                  </a:moveTo>
-                  <a:cubicBezTo>
-                    <a:pt x="6171" y="67111"/>
-                    <a:pt x="4067" y="66258"/>
-                    <a:pt x="2474" y="64665"/>
-                  </a:cubicBezTo>
-                  <a:cubicBezTo>
-                    <a:pt x="882" y="63073"/>
-                    <a:pt x="0" y="60940"/>
-                    <a:pt x="0" y="58694"/>
-                  </a:cubicBezTo>
-                  <a:cubicBezTo>
-                    <a:pt x="0" y="56447"/>
-                    <a:pt x="882" y="54343"/>
-                    <a:pt x="2474" y="52750"/>
-                  </a:cubicBezTo>
-                  <a:lnTo>
-                    <a:pt x="51954" y="3271"/>
-                  </a:lnTo>
-                  <a:cubicBezTo>
-                    <a:pt x="55224" y="0"/>
-                    <a:pt x="60570" y="0"/>
-                    <a:pt x="63841" y="3271"/>
-                  </a:cubicBezTo>
-                  <a:lnTo>
-                    <a:pt x="63841" y="3271"/>
-                  </a:lnTo>
-                  <a:cubicBezTo>
-                    <a:pt x="65433" y="4863"/>
-                    <a:pt x="66315" y="6996"/>
-                    <a:pt x="66315" y="9242"/>
-                  </a:cubicBezTo>
-                  <a:cubicBezTo>
-                    <a:pt x="66315" y="11489"/>
-                    <a:pt x="65433" y="13593"/>
-                    <a:pt x="63841" y="15186"/>
-                  </a:cubicBezTo>
-                  <a:lnTo>
-                    <a:pt x="14389" y="64665"/>
-                  </a:lnTo>
-                  <a:cubicBezTo>
-                    <a:pt x="12797" y="66258"/>
-                    <a:pt x="10692" y="67111"/>
-                    <a:pt x="8446" y="67111"/>
-                  </a:cubicBezTo>
-                  <a:close/>
-                  <a:moveTo>
-                    <a:pt x="57897" y="2588"/>
-                  </a:moveTo>
-                  <a:cubicBezTo>
-                    <a:pt x="56191" y="2588"/>
-                    <a:pt x="54485" y="3242"/>
-                    <a:pt x="53205" y="4522"/>
-                  </a:cubicBezTo>
-                  <a:lnTo>
-                    <a:pt x="3725" y="54002"/>
-                  </a:lnTo>
-                  <a:cubicBezTo>
-                    <a:pt x="2474" y="55253"/>
-                    <a:pt x="1792" y="56931"/>
-                    <a:pt x="1792" y="58694"/>
-                  </a:cubicBezTo>
-                  <a:cubicBezTo>
-                    <a:pt x="1792" y="60457"/>
-                    <a:pt x="2474" y="62135"/>
-                    <a:pt x="3725" y="63386"/>
-                  </a:cubicBezTo>
-                  <a:cubicBezTo>
-                    <a:pt x="4977" y="64637"/>
-                    <a:pt x="6654" y="65348"/>
-                    <a:pt x="8418" y="65348"/>
-                  </a:cubicBezTo>
-                  <a:cubicBezTo>
-                    <a:pt x="10209" y="65348"/>
-                    <a:pt x="11858" y="64637"/>
-                    <a:pt x="13138" y="63386"/>
-                  </a:cubicBezTo>
-                  <a:lnTo>
-                    <a:pt x="62589" y="13934"/>
-                  </a:lnTo>
-                  <a:cubicBezTo>
-                    <a:pt x="63841" y="12683"/>
-                    <a:pt x="64523" y="11005"/>
-                    <a:pt x="64523" y="9242"/>
-                  </a:cubicBezTo>
-                  <a:cubicBezTo>
-                    <a:pt x="64523" y="7451"/>
-                    <a:pt x="63841" y="5801"/>
-                    <a:pt x="62589" y="4550"/>
-                  </a:cubicBezTo>
-                  <a:lnTo>
-                    <a:pt x="62589" y="4550"/>
-                  </a:lnTo>
-                  <a:cubicBezTo>
-                    <a:pt x="61310" y="3242"/>
-                    <a:pt x="59604" y="2588"/>
-                    <a:pt x="57897" y="2588"/>
-                  </a:cubicBezTo>
-                  <a:close/>
-                </a:path>
-              </a:pathLst>
-            </a:custGeom>
-            <a:gradFill>
-              <a:gsLst>
-                <a:gs pos="0">
-                  <a:schemeClr val="lt2"/>
-                </a:gs>
-                <a:gs pos="100000">
-                  <a:schemeClr val="accent3"/>
-                </a:gs>
-              </a:gsLst>
-              <a:lin ang="10800025" scaled="0"/>
-            </a:gradFill>
-            <a:ln>
-              <a:noFill/>
-            </a:ln>
-          </p:spPr>
-          <p:txBody>
-            <a:bodyPr spcFirstLastPara="1" wrap="square" lIns="91425" tIns="91425" rIns="91425" bIns="91425" anchor="ctr" anchorCtr="0">
-              <a:noAutofit/>
-            </a:bodyPr>
-            <a:lstStyle/>
-            <a:p>
-              <a:pPr marL="0" lvl="0" indent="0" algn="l" rtl="0">
-                <a:spcBef>
-                  <a:spcPts val="0"/>
-                </a:spcBef>
-                <a:spcAft>
-                  <a:spcPts val="0"/>
-                </a:spcAft>
-                <a:buNone/>
-              </a:pPr>
-              <a:endParaRPr/>
-            </a:p>
-          </p:txBody>
-        </p:sp>
-      </p:grpSp>
-    </p:spTree>
-  </p:cSld>
-  <p:clrMapOvr>
-    <a:masterClrMapping/>
-  </p:clrMapOvr>
-</p:sldLayout>
-</file>
-
-<file path=ppt/slideLayouts/slideLayout3.xml><?xml version="1.0" encoding="utf-8"?>
 <p:sldLayout xmlns:a="http://schemas.openxmlformats.org/drawingml/2006/main" xmlns:r="http://schemas.openxmlformats.org/officeDocument/2006/relationships" xmlns:p="http://schemas.openxmlformats.org/presentationml/2006/main" matchingName="Blank" type="blank">
   <p:cSld name="BLANK">
     <p:spTree>
@@ -2740,7 +1225,7 @@
 </p:sldLayout>
 </file>
 
-<file path=ppt/slideLayouts/slideLayout4.xml><?xml version="1.0" encoding="utf-8"?>
+<file path=ppt/slideLayouts/slideLayout3.xml><?xml version="1.0" encoding="utf-8"?>
 <p:sldLayout xmlns:a="http://schemas.openxmlformats.org/drawingml/2006/main" xmlns:r="http://schemas.openxmlformats.org/officeDocument/2006/relationships" xmlns:p="http://schemas.openxmlformats.org/presentationml/2006/main" matchingName="Background">
   <p:cSld name="CUSTOM_9">
     <p:spTree>
@@ -3185,7 +1670,7 @@
 </p:sldLayout>
 </file>
 
-<file path=ppt/slideLayouts/slideLayout5.xml><?xml version="1.0" encoding="utf-8"?>
+<file path=ppt/slideLayouts/slideLayout4.xml><?xml version="1.0" encoding="utf-8"?>
 <p:sldLayout xmlns:a="http://schemas.openxmlformats.org/drawingml/2006/main" xmlns:r="http://schemas.openxmlformats.org/officeDocument/2006/relationships" xmlns:p="http://schemas.openxmlformats.org/presentationml/2006/main" matchingName="Background 1">
   <p:cSld name="CUSTOM_9_1">
     <p:spTree>
@@ -4169,10 +2654,9 @@
   <p:clrMap bg1="lt1" tx1="dk1" bg2="dk2" tx2="lt2" accent1="accent1" accent2="accent2" accent3="accent3" accent4="accent4" accent5="accent5" accent6="accent6" hlink="hlink" folHlink="folHlink"/>
   <p:sldLayoutIdLst>
     <p:sldLayoutId id="2147483648" r:id="rId1"/>
-    <p:sldLayoutId id="2147483650" r:id="rId2"/>
-    <p:sldLayoutId id="2147483658" r:id="rId3"/>
-    <p:sldLayoutId id="2147483673" r:id="rId4"/>
-    <p:sldLayoutId id="2147483674" r:id="rId5"/>
+    <p:sldLayoutId id="2147483658" r:id="rId2"/>
+    <p:sldLayoutId id="2147483673" r:id="rId3"/>
+    <p:sldLayoutId id="2147483674" r:id="rId4"/>
   </p:sldLayoutIdLst>
   <p:hf hdr="0" ftr="0" dt="0"/>
   <p:txStyles>
@@ -6370,326 +4854,6 @@
           </p:txBody>
         </p:sp>
       </p:grpSp>
-    </p:spTree>
-  </p:cSld>
-  <p:clrMapOvr>
-    <a:masterClrMapping/>
-  </p:clrMapOvr>
-</p:sld>
-</file>
-
-<file path=ppt/slides/slide2.xml><?xml version="1.0" encoding="utf-8"?>
-<p:sld xmlns:a="http://schemas.openxmlformats.org/drawingml/2006/main" xmlns:r="http://schemas.openxmlformats.org/officeDocument/2006/relationships" xmlns:p="http://schemas.openxmlformats.org/presentationml/2006/main">
-  <p:cSld>
-    <p:spTree>
-      <p:nvGrpSpPr>
-        <p:cNvPr id="1" name="Shape 301"/>
-        <p:cNvGrpSpPr/>
-        <p:nvPr/>
-      </p:nvGrpSpPr>
-      <p:grpSpPr>
-        <a:xfrm>
-          <a:off x="0" y="0"/>
-          <a:ext cx="0" cy="0"/>
-          <a:chOff x="0" y="0"/>
-          <a:chExt cx="0" cy="0"/>
-        </a:xfrm>
-      </p:grpSpPr>
-      <p:grpSp>
-        <p:nvGrpSpPr>
-          <p:cNvPr id="306" name="Google Shape;306;p33"/>
-          <p:cNvGrpSpPr/>
-          <p:nvPr/>
-        </p:nvGrpSpPr>
-        <p:grpSpPr>
-          <a:xfrm flipH="1">
-            <a:off x="-140916" y="0"/>
-            <a:ext cx="1590595" cy="875375"/>
-            <a:chOff x="6456464" y="3575600"/>
-            <a:chExt cx="1004100" cy="552601"/>
-          </a:xfrm>
-        </p:grpSpPr>
-        <p:sp>
-          <p:nvSpPr>
-            <p:cNvPr id="307" name="Google Shape;307;p33"/>
-            <p:cNvSpPr/>
-            <p:nvPr/>
-          </p:nvSpPr>
-          <p:spPr>
-            <a:xfrm>
-              <a:off x="6456464" y="3575601"/>
-              <a:ext cx="1004100" cy="552600"/>
-            </a:xfrm>
-            <a:prstGeom prst="roundRect">
-              <a:avLst>
-                <a:gd name="adj" fmla="val 50000"/>
-              </a:avLst>
-            </a:prstGeom>
-            <a:gradFill>
-              <a:gsLst>
-                <a:gs pos="0">
-                  <a:schemeClr val="lt2"/>
-                </a:gs>
-                <a:gs pos="100000">
-                  <a:schemeClr val="accent3"/>
-                </a:gs>
-              </a:gsLst>
-              <a:lin ang="10800025" scaled="0"/>
-            </a:gradFill>
-            <a:ln>
-              <a:noFill/>
-            </a:ln>
-          </p:spPr>
-          <p:txBody>
-            <a:bodyPr spcFirstLastPara="1" wrap="square" lIns="91425" tIns="91425" rIns="91425" bIns="91425" anchor="ctr" anchorCtr="0">
-              <a:noAutofit/>
-            </a:bodyPr>
-            <a:lstStyle/>
-            <a:p>
-              <a:pPr marL="0" lvl="0" indent="0" algn="l" rtl="0">
-                <a:spcBef>
-                  <a:spcPts val="0"/>
-                </a:spcBef>
-                <a:spcAft>
-                  <a:spcPts val="0"/>
-                </a:spcAft>
-                <a:buNone/>
-              </a:pPr>
-              <a:endParaRPr/>
-            </a:p>
-          </p:txBody>
-        </p:sp>
-        <p:sp>
-          <p:nvSpPr>
-            <p:cNvPr id="308" name="Google Shape;308;p33"/>
-            <p:cNvSpPr/>
-            <p:nvPr/>
-          </p:nvSpPr>
-          <p:spPr>
-            <a:xfrm>
-              <a:off x="6456475" y="3575600"/>
-              <a:ext cx="552600" cy="552600"/>
-            </a:xfrm>
-            <a:prstGeom prst="ellipse">
-              <a:avLst/>
-            </a:prstGeom>
-            <a:solidFill>
-              <a:schemeClr val="lt2"/>
-            </a:solidFill>
-            <a:ln>
-              <a:noFill/>
-            </a:ln>
-          </p:spPr>
-          <p:txBody>
-            <a:bodyPr spcFirstLastPara="1" wrap="square" lIns="91425" tIns="91425" rIns="91425" bIns="91425" anchor="ctr" anchorCtr="0">
-              <a:noAutofit/>
-            </a:bodyPr>
-            <a:lstStyle/>
-            <a:p>
-              <a:pPr marL="0" lvl="0" indent="0" algn="l" rtl="0">
-                <a:spcBef>
-                  <a:spcPts val="0"/>
-                </a:spcBef>
-                <a:spcAft>
-                  <a:spcPts val="0"/>
-                </a:spcAft>
-                <a:buNone/>
-              </a:pPr>
-              <a:endParaRPr/>
-            </a:p>
-          </p:txBody>
-        </p:sp>
-      </p:grpSp>
-      <p:grpSp>
-        <p:nvGrpSpPr>
-          <p:cNvPr id="309" name="Google Shape;309;p33"/>
-          <p:cNvGrpSpPr/>
-          <p:nvPr/>
-        </p:nvGrpSpPr>
-        <p:grpSpPr>
-          <a:xfrm flipH="1">
-            <a:off x="-140916" y="4435994"/>
-            <a:ext cx="1249832" cy="707506"/>
-            <a:chOff x="6456475" y="3575600"/>
-            <a:chExt cx="976202" cy="552609"/>
-          </a:xfrm>
-        </p:grpSpPr>
-        <p:sp>
-          <p:nvSpPr>
-            <p:cNvPr id="310" name="Google Shape;310;p33"/>
-            <p:cNvSpPr/>
-            <p:nvPr/>
-          </p:nvSpPr>
-          <p:spPr>
-            <a:xfrm>
-              <a:off x="6456477" y="3575609"/>
-              <a:ext cx="976200" cy="552600"/>
-            </a:xfrm>
-            <a:prstGeom prst="roundRect">
-              <a:avLst>
-                <a:gd name="adj" fmla="val 50000"/>
-              </a:avLst>
-            </a:prstGeom>
-            <a:gradFill>
-              <a:gsLst>
-                <a:gs pos="0">
-                  <a:schemeClr val="accent3"/>
-                </a:gs>
-                <a:gs pos="100000">
-                  <a:schemeClr val="lt2"/>
-                </a:gs>
-              </a:gsLst>
-              <a:lin ang="10800025" scaled="0"/>
-            </a:gradFill>
-            <a:ln>
-              <a:noFill/>
-            </a:ln>
-          </p:spPr>
-          <p:txBody>
-            <a:bodyPr spcFirstLastPara="1" wrap="square" lIns="91425" tIns="91425" rIns="91425" bIns="91425" anchor="ctr" anchorCtr="0">
-              <a:noAutofit/>
-            </a:bodyPr>
-            <a:lstStyle/>
-            <a:p>
-              <a:pPr marL="0" lvl="0" indent="0" algn="l" rtl="0">
-                <a:spcBef>
-                  <a:spcPts val="0"/>
-                </a:spcBef>
-                <a:spcAft>
-                  <a:spcPts val="0"/>
-                </a:spcAft>
-                <a:buNone/>
-              </a:pPr>
-              <a:endParaRPr/>
-            </a:p>
-          </p:txBody>
-        </p:sp>
-        <p:sp>
-          <p:nvSpPr>
-            <p:cNvPr id="311" name="Google Shape;311;p33"/>
-            <p:cNvSpPr/>
-            <p:nvPr/>
-          </p:nvSpPr>
-          <p:spPr>
-            <a:xfrm>
-              <a:off x="6456475" y="3575600"/>
-              <a:ext cx="552600" cy="552600"/>
-            </a:xfrm>
-            <a:prstGeom prst="ellipse">
-              <a:avLst/>
-            </a:prstGeom>
-            <a:solidFill>
-              <a:schemeClr val="accent2"/>
-            </a:solidFill>
-            <a:ln>
-              <a:noFill/>
-            </a:ln>
-          </p:spPr>
-          <p:txBody>
-            <a:bodyPr spcFirstLastPara="1" wrap="square" lIns="91425" tIns="91425" rIns="91425" bIns="91425" anchor="ctr" anchorCtr="0">
-              <a:noAutofit/>
-            </a:bodyPr>
-            <a:lstStyle/>
-            <a:p>
-              <a:pPr marL="0" lvl="0" indent="0" algn="l" rtl="0">
-                <a:spcBef>
-                  <a:spcPts val="0"/>
-                </a:spcBef>
-                <a:spcAft>
-                  <a:spcPts val="0"/>
-                </a:spcAft>
-                <a:buNone/>
-              </a:pPr>
-              <a:endParaRPr/>
-            </a:p>
-          </p:txBody>
-        </p:sp>
-      </p:grpSp>
-      <p:sp>
-        <p:nvSpPr>
-          <p:cNvPr id="312" name="Google Shape;312;p33"/>
-          <p:cNvSpPr txBox="1">
-            <a:spLocks noGrp="1"/>
-          </p:cNvSpPr>
-          <p:nvPr>
-            <p:ph type="title"/>
-          </p:nvPr>
-        </p:nvSpPr>
-        <p:spPr>
-          <a:xfrm>
-            <a:off x="755169" y="151336"/>
-            <a:ext cx="7704000" cy="572700"/>
-          </a:xfrm>
-          <a:prstGeom prst="rect">
-            <a:avLst/>
-          </a:prstGeom>
-        </p:spPr>
-        <p:txBody>
-          <a:bodyPr spcFirstLastPara="1" wrap="square" lIns="91425" tIns="91425" rIns="91425" bIns="91425" anchor="t" anchorCtr="0">
-            <a:noAutofit/>
-          </a:bodyPr>
-          <a:lstStyle/>
-          <a:p>
-            <a:pPr marL="0" lvl="0" indent="0" algn="ctr" rtl="0">
-              <a:spcBef>
-                <a:spcPts val="0"/>
-              </a:spcBef>
-              <a:spcAft>
-                <a:spcPts val="0"/>
-              </a:spcAft>
-              <a:buNone/>
-            </a:pPr>
-            <a:r>
-              <a:rPr lang="en" sz="2800" dirty="0"/>
-              <a:t>Demo Page</a:t>
-            </a:r>
-            <a:endParaRPr sz="2800" dirty="0"/>
-          </a:p>
-        </p:txBody>
-      </p:sp>
-      <p:sp>
-        <p:nvSpPr>
-          <p:cNvPr id="2" name="TextBox 1">
-            <a:extLst>
-              <a:ext uri="{FF2B5EF4-FFF2-40B4-BE49-F238E27FC236}">
-                <a16:creationId xmlns:a16="http://schemas.microsoft.com/office/drawing/2014/main" id="{94559E72-DB84-E5C6-656F-C96959A56B45}"/>
-              </a:ext>
-            </a:extLst>
-          </p:cNvPr>
-          <p:cNvSpPr txBox="1"/>
-          <p:nvPr/>
-        </p:nvSpPr>
-        <p:spPr>
-          <a:xfrm>
-            <a:off x="1011975" y="1040054"/>
-            <a:ext cx="7418800" cy="338554"/>
-          </a:xfrm>
-          <a:prstGeom prst="rect">
-            <a:avLst/>
-          </a:prstGeom>
-          <a:noFill/>
-        </p:spPr>
-        <p:txBody>
-          <a:bodyPr wrap="square" rtlCol="0">
-            <a:spAutoFit/>
-          </a:bodyPr>
-          <a:lstStyle/>
-          <a:p>
-            <a:r>
-              <a:rPr lang="en-GB" sz="1600" dirty="0">
-                <a:solidFill>
-                  <a:srgbClr val="191919"/>
-                </a:solidFill>
-                <a:latin typeface="Albert Sans"/>
-                <a:ea typeface="Albert Sans"/>
-                <a:cs typeface="Albert Sans"/>
-                <a:sym typeface="Albert Sans"/>
-              </a:rPr>
-              <a:t>Demo Body</a:t>
-            </a:r>
-          </a:p>
-        </p:txBody>
-      </p:sp>
     </p:spTree>
   </p:cSld>
   <p:clrMapOvr>

--- a/template1.pptx
+++ b/template1.pptx
@@ -5,20 +5,28 @@
     <p:sldMasterId id="2147483677" r:id="rId1"/>
   </p:sldMasterIdLst>
   <p:notesMasterIdLst>
-    <p:notesMasterId r:id="rId3"/>
+    <p:notesMasterId r:id="rId4"/>
   </p:notesMasterIdLst>
   <p:sldIdLst>
     <p:sldId id="256" r:id="rId2"/>
+    <p:sldId id="257" r:id="rId3"/>
   </p:sldIdLst>
   <p:sldSz cx="9144000" cy="5143500" type="screen16x9"/>
   <p:notesSz cx="6858000" cy="9144000"/>
   <p:embeddedFontLst>
     <p:embeddedFont>
       <p:font typeface="Albert Sans" panose="020B0604020202020204" charset="0"/>
-      <p:regular r:id="rId4"/>
-      <p:bold r:id="rId5"/>
-      <p:italic r:id="rId6"/>
-      <p:boldItalic r:id="rId7"/>
+      <p:regular r:id="rId5"/>
+      <p:bold r:id="rId6"/>
+      <p:italic r:id="rId7"/>
+      <p:boldItalic r:id="rId8"/>
+    </p:embeddedFont>
+    <p:embeddedFont>
+      <p:font typeface="Segoe UI" panose="020B0502040204020203" pitchFamily="34" charset="0"/>
+      <p:regular r:id="rId9"/>
+      <p:bold r:id="rId10"/>
+      <p:italic r:id="rId11"/>
+      <p:boldItalic r:id="rId12"/>
     </p:embeddedFont>
   </p:embeddedFontLst>
   <p:defaultTextStyle>
@@ -1201,31 +1209,6 @@
 </file>
 
 <file path=ppt/slideLayouts/slideLayout2.xml><?xml version="1.0" encoding="utf-8"?>
-<p:sldLayout xmlns:a="http://schemas.openxmlformats.org/drawingml/2006/main" xmlns:r="http://schemas.openxmlformats.org/officeDocument/2006/relationships" xmlns:p="http://schemas.openxmlformats.org/presentationml/2006/main" matchingName="Blank" type="blank">
-  <p:cSld name="BLANK">
-    <p:spTree>
-      <p:nvGrpSpPr>
-        <p:cNvPr id="1" name="Shape 81"/>
-        <p:cNvGrpSpPr/>
-        <p:nvPr/>
-      </p:nvGrpSpPr>
-      <p:grpSpPr>
-        <a:xfrm>
-          <a:off x="0" y="0"/>
-          <a:ext cx="0" cy="0"/>
-          <a:chOff x="0" y="0"/>
-          <a:chExt cx="0" cy="0"/>
-        </a:xfrm>
-      </p:grpSpPr>
-    </p:spTree>
-  </p:cSld>
-  <p:clrMapOvr>
-    <a:masterClrMapping/>
-  </p:clrMapOvr>
-</p:sldLayout>
-</file>
-
-<file path=ppt/slideLayouts/slideLayout3.xml><?xml version="1.0" encoding="utf-8"?>
 <p:sldLayout xmlns:a="http://schemas.openxmlformats.org/drawingml/2006/main" xmlns:r="http://schemas.openxmlformats.org/officeDocument/2006/relationships" xmlns:p="http://schemas.openxmlformats.org/presentationml/2006/main" matchingName="Background">
   <p:cSld name="CUSTOM_9">
     <p:spTree>
@@ -1670,7 +1653,7 @@
 </p:sldLayout>
 </file>
 
-<file path=ppt/slideLayouts/slideLayout4.xml><?xml version="1.0" encoding="utf-8"?>
+<file path=ppt/slideLayouts/slideLayout3.xml><?xml version="1.0" encoding="utf-8"?>
 <p:sldLayout xmlns:a="http://schemas.openxmlformats.org/drawingml/2006/main" xmlns:r="http://schemas.openxmlformats.org/officeDocument/2006/relationships" xmlns:p="http://schemas.openxmlformats.org/presentationml/2006/main" matchingName="Background 1">
   <p:cSld name="CUSTOM_9_1">
     <p:spTree>
@@ -2654,9 +2637,8 @@
   <p:clrMap bg1="lt1" tx1="dk1" bg2="dk2" tx2="lt2" accent1="accent1" accent2="accent2" accent3="accent3" accent4="accent4" accent5="accent5" accent6="accent6" hlink="hlink" folHlink="folHlink"/>
   <p:sldLayoutIdLst>
     <p:sldLayoutId id="2147483648" r:id="rId1"/>
-    <p:sldLayoutId id="2147483658" r:id="rId2"/>
-    <p:sldLayoutId id="2147483673" r:id="rId3"/>
-    <p:sldLayoutId id="2147483674" r:id="rId4"/>
+    <p:sldLayoutId id="2147483673" r:id="rId2"/>
+    <p:sldLayoutId id="2147483674" r:id="rId3"/>
   </p:sldLayoutIdLst>
   <p:hf hdr="0" ftr="0" dt="0"/>
   <p:txStyles>
@@ -4855,6 +4837,120 @@
         </p:sp>
       </p:grpSp>
     </p:spTree>
+  </p:cSld>
+  <p:clrMapOvr>
+    <a:masterClrMapping/>
+  </p:clrMapOvr>
+</p:sld>
+</file>
+
+<file path=ppt/slides/slide2.xml><?xml version="1.0" encoding="utf-8"?>
+<p:sld xmlns:a="http://schemas.openxmlformats.org/drawingml/2006/main" xmlns:r="http://schemas.openxmlformats.org/officeDocument/2006/relationships" xmlns:p="http://schemas.openxmlformats.org/presentationml/2006/main">
+  <p:cSld>
+    <p:spTree>
+      <p:nvGrpSpPr>
+        <p:cNvPr id="1" name=""/>
+        <p:cNvGrpSpPr/>
+        <p:nvPr/>
+      </p:nvGrpSpPr>
+      <p:grpSpPr>
+        <a:xfrm>
+          <a:off x="0" y="0"/>
+          <a:ext cx="0" cy="0"/>
+          <a:chOff x="0" y="0"/>
+          <a:chExt cx="0" cy="0"/>
+        </a:xfrm>
+      </p:grpSpPr>
+      <p:sp>
+        <p:nvSpPr>
+          <p:cNvPr id="2" name="TextBox 1">
+            <a:extLst>
+              <a:ext uri="{FF2B5EF4-FFF2-40B4-BE49-F238E27FC236}">
+                <a16:creationId xmlns:a16="http://schemas.microsoft.com/office/drawing/2014/main" id="{2647571B-039C-5C4B-4AE2-66D6C89A9DB7}"/>
+              </a:ext>
+            </a:extLst>
+          </p:cNvPr>
+          <p:cNvSpPr txBox="1"/>
+          <p:nvPr/>
+        </p:nvSpPr>
+        <p:spPr>
+          <a:xfrm>
+            <a:off x="1684421" y="192505"/>
+            <a:ext cx="5500151" cy="584775"/>
+          </a:xfrm>
+          <a:prstGeom prst="rect">
+            <a:avLst/>
+          </a:prstGeom>
+          <a:noFill/>
+        </p:spPr>
+        <p:txBody>
+          <a:bodyPr wrap="square" rtlCol="0">
+            <a:spAutoFit/>
+          </a:bodyPr>
+          <a:lstStyle/>
+          <a:p>
+            <a:r>
+              <a:rPr lang="en-US" sz="3200" b="1" dirty="0">
+                <a:latin typeface="Segoe UI" panose="020B0502040204020203" pitchFamily="34" charset="0"/>
+                <a:cs typeface="Segoe UI" panose="020B0502040204020203" pitchFamily="34" charset="0"/>
+              </a:rPr>
+              <a:t>Demo Header</a:t>
+            </a:r>
+            <a:endParaRPr lang="en-GB" sz="3200" b="1" dirty="0">
+              <a:latin typeface="Segoe UI" panose="020B0502040204020203" pitchFamily="34" charset="0"/>
+              <a:cs typeface="Segoe UI" panose="020B0502040204020203" pitchFamily="34" charset="0"/>
+            </a:endParaRPr>
+          </a:p>
+        </p:txBody>
+      </p:sp>
+      <p:sp>
+        <p:nvSpPr>
+          <p:cNvPr id="3" name="TextBox 2">
+            <a:extLst>
+              <a:ext uri="{FF2B5EF4-FFF2-40B4-BE49-F238E27FC236}">
+                <a16:creationId xmlns:a16="http://schemas.microsoft.com/office/drawing/2014/main" id="{FE4E9EC9-14B3-3556-A191-F6FEBFB97318}"/>
+              </a:ext>
+            </a:extLst>
+          </p:cNvPr>
+          <p:cNvSpPr txBox="1"/>
+          <p:nvPr/>
+        </p:nvSpPr>
+        <p:spPr>
+          <a:xfrm>
+            <a:off x="1760047" y="777280"/>
+            <a:ext cx="5500151" cy="338554"/>
+          </a:xfrm>
+          <a:prstGeom prst="rect">
+            <a:avLst/>
+          </a:prstGeom>
+          <a:noFill/>
+        </p:spPr>
+        <p:txBody>
+          <a:bodyPr wrap="square" rtlCol="0">
+            <a:spAutoFit/>
+          </a:bodyPr>
+          <a:lstStyle/>
+          <a:p>
+            <a:r>
+              <a:rPr lang="en-US" sz="1600" dirty="0">
+                <a:latin typeface="Segoe UI" panose="020B0502040204020203" pitchFamily="34" charset="0"/>
+                <a:cs typeface="Segoe UI" panose="020B0502040204020203" pitchFamily="34" charset="0"/>
+              </a:rPr>
+              <a:t>Demo Body</a:t>
+            </a:r>
+            <a:endParaRPr lang="en-GB" sz="1600" dirty="0">
+              <a:latin typeface="Segoe UI" panose="020B0502040204020203" pitchFamily="34" charset="0"/>
+              <a:cs typeface="Segoe UI" panose="020B0502040204020203" pitchFamily="34" charset="0"/>
+            </a:endParaRPr>
+          </a:p>
+        </p:txBody>
+      </p:sp>
+    </p:spTree>
+    <p:extLst>
+      <p:ext uri="{BB962C8B-B14F-4D97-AF65-F5344CB8AC3E}">
+        <p14:creationId xmlns:p14="http://schemas.microsoft.com/office/powerpoint/2010/main" val="3325551155"/>
+      </p:ext>
+    </p:extLst>
   </p:cSld>
   <p:clrMapOvr>
     <a:masterClrMapping/>

--- a/template1.pptx
+++ b/template1.pptx
@@ -20,13 +20,6 @@
       <p:bold r:id="rId6"/>
       <p:italic r:id="rId7"/>
       <p:boldItalic r:id="rId8"/>
-    </p:embeddedFont>
-    <p:embeddedFont>
-      <p:font typeface="Segoe UI" panose="020B0502040204020203" pitchFamily="34" charset="0"/>
-      <p:regular r:id="rId9"/>
-      <p:bold r:id="rId10"/>
-      <p:italic r:id="rId11"/>
-      <p:boldItalic r:id="rId12"/>
     </p:embeddedFont>
   </p:embeddedFontLst>
   <p:defaultTextStyle>
@@ -4863,10 +4856,276 @@
       </p:grpSpPr>
       <p:sp>
         <p:nvSpPr>
-          <p:cNvPr id="2" name="TextBox 1">
+          <p:cNvPr id="4" name="Google Shape;312;p33">
             <a:extLst>
               <a:ext uri="{FF2B5EF4-FFF2-40B4-BE49-F238E27FC236}">
-                <a16:creationId xmlns:a16="http://schemas.microsoft.com/office/drawing/2014/main" id="{2647571B-039C-5C4B-4AE2-66D6C89A9DB7}"/>
+                <a16:creationId xmlns:a16="http://schemas.microsoft.com/office/drawing/2014/main" id="{78DE070C-AAFD-1BA8-9003-D86688B31021}"/>
+              </a:ext>
+            </a:extLst>
+          </p:cNvPr>
+          <p:cNvSpPr txBox="1">
+            <a:spLocks/>
+          </p:cNvSpPr>
+          <p:nvPr/>
+        </p:nvSpPr>
+        <p:spPr>
+          <a:xfrm>
+            <a:off x="755169" y="151336"/>
+            <a:ext cx="7704000" cy="572700"/>
+          </a:xfrm>
+          <a:prstGeom prst="rect">
+            <a:avLst/>
+          </a:prstGeom>
+        </p:spPr>
+        <p:txBody>
+          <a:bodyPr spcFirstLastPara="1" wrap="square" lIns="91425" tIns="91425" rIns="91425" bIns="91425" anchor="t" anchorCtr="0">
+            <a:noAutofit/>
+          </a:bodyPr>
+          <a:lstStyle>
+            <a:defPPr marR="0" lvl="0" algn="l" rtl="0">
+              <a:lnSpc>
+                <a:spcPct val="100000"/>
+              </a:lnSpc>
+              <a:spcBef>
+                <a:spcPts val="0"/>
+              </a:spcBef>
+              <a:spcAft>
+                <a:spcPts val="0"/>
+              </a:spcAft>
+            </a:defPPr>
+            <a:lvl1pPr marR="0" lvl="0" algn="l" rtl="0">
+              <a:lnSpc>
+                <a:spcPct val="100000"/>
+              </a:lnSpc>
+              <a:spcBef>
+                <a:spcPts val="0"/>
+              </a:spcBef>
+              <a:spcAft>
+                <a:spcPts val="0"/>
+              </a:spcAft>
+              <a:buClr>
+                <a:srgbClr val="000000"/>
+              </a:buClr>
+              <a:buFont typeface="Arial"/>
+              <a:defRPr sz="1400" b="0" i="0" u="none" strike="noStrike" cap="none">
+                <a:solidFill>
+                  <a:srgbClr val="000000"/>
+                </a:solidFill>
+                <a:latin typeface="Arial"/>
+                <a:ea typeface="Arial"/>
+                <a:cs typeface="Arial"/>
+                <a:sym typeface="Arial"/>
+              </a:defRPr>
+            </a:lvl1pPr>
+            <a:lvl2pPr marR="0" lvl="1" algn="l" rtl="0">
+              <a:lnSpc>
+                <a:spcPct val="100000"/>
+              </a:lnSpc>
+              <a:spcBef>
+                <a:spcPts val="0"/>
+              </a:spcBef>
+              <a:spcAft>
+                <a:spcPts val="0"/>
+              </a:spcAft>
+              <a:buClr>
+                <a:srgbClr val="000000"/>
+              </a:buClr>
+              <a:buFont typeface="Arial"/>
+              <a:defRPr sz="1400" b="0" i="0" u="none" strike="noStrike" cap="none">
+                <a:solidFill>
+                  <a:srgbClr val="000000"/>
+                </a:solidFill>
+                <a:latin typeface="Arial"/>
+                <a:ea typeface="Arial"/>
+                <a:cs typeface="Arial"/>
+                <a:sym typeface="Arial"/>
+              </a:defRPr>
+            </a:lvl2pPr>
+            <a:lvl3pPr marR="0" lvl="2" algn="l" rtl="0">
+              <a:lnSpc>
+                <a:spcPct val="100000"/>
+              </a:lnSpc>
+              <a:spcBef>
+                <a:spcPts val="0"/>
+              </a:spcBef>
+              <a:spcAft>
+                <a:spcPts val="0"/>
+              </a:spcAft>
+              <a:buClr>
+                <a:srgbClr val="000000"/>
+              </a:buClr>
+              <a:buFont typeface="Arial"/>
+              <a:defRPr sz="1400" b="0" i="0" u="none" strike="noStrike" cap="none">
+                <a:solidFill>
+                  <a:srgbClr val="000000"/>
+                </a:solidFill>
+                <a:latin typeface="Arial"/>
+                <a:ea typeface="Arial"/>
+                <a:cs typeface="Arial"/>
+                <a:sym typeface="Arial"/>
+              </a:defRPr>
+            </a:lvl3pPr>
+            <a:lvl4pPr marR="0" lvl="3" algn="l" rtl="0">
+              <a:lnSpc>
+                <a:spcPct val="100000"/>
+              </a:lnSpc>
+              <a:spcBef>
+                <a:spcPts val="0"/>
+              </a:spcBef>
+              <a:spcAft>
+                <a:spcPts val="0"/>
+              </a:spcAft>
+              <a:buClr>
+                <a:srgbClr val="000000"/>
+              </a:buClr>
+              <a:buFont typeface="Arial"/>
+              <a:defRPr sz="1400" b="0" i="0" u="none" strike="noStrike" cap="none">
+                <a:solidFill>
+                  <a:srgbClr val="000000"/>
+                </a:solidFill>
+                <a:latin typeface="Arial"/>
+                <a:ea typeface="Arial"/>
+                <a:cs typeface="Arial"/>
+                <a:sym typeface="Arial"/>
+              </a:defRPr>
+            </a:lvl4pPr>
+            <a:lvl5pPr marR="0" lvl="4" algn="l" rtl="0">
+              <a:lnSpc>
+                <a:spcPct val="100000"/>
+              </a:lnSpc>
+              <a:spcBef>
+                <a:spcPts val="0"/>
+              </a:spcBef>
+              <a:spcAft>
+                <a:spcPts val="0"/>
+              </a:spcAft>
+              <a:buClr>
+                <a:srgbClr val="000000"/>
+              </a:buClr>
+              <a:buFont typeface="Arial"/>
+              <a:defRPr sz="1400" b="0" i="0" u="none" strike="noStrike" cap="none">
+                <a:solidFill>
+                  <a:srgbClr val="000000"/>
+                </a:solidFill>
+                <a:latin typeface="Arial"/>
+                <a:ea typeface="Arial"/>
+                <a:cs typeface="Arial"/>
+                <a:sym typeface="Arial"/>
+              </a:defRPr>
+            </a:lvl5pPr>
+            <a:lvl6pPr marR="0" lvl="5" algn="l" rtl="0">
+              <a:lnSpc>
+                <a:spcPct val="100000"/>
+              </a:lnSpc>
+              <a:spcBef>
+                <a:spcPts val="0"/>
+              </a:spcBef>
+              <a:spcAft>
+                <a:spcPts val="0"/>
+              </a:spcAft>
+              <a:buClr>
+                <a:srgbClr val="000000"/>
+              </a:buClr>
+              <a:buFont typeface="Arial"/>
+              <a:defRPr sz="1400" b="0" i="0" u="none" strike="noStrike" cap="none">
+                <a:solidFill>
+                  <a:srgbClr val="000000"/>
+                </a:solidFill>
+                <a:latin typeface="Arial"/>
+                <a:ea typeface="Arial"/>
+                <a:cs typeface="Arial"/>
+                <a:sym typeface="Arial"/>
+              </a:defRPr>
+            </a:lvl6pPr>
+            <a:lvl7pPr marR="0" lvl="6" algn="l" rtl="0">
+              <a:lnSpc>
+                <a:spcPct val="100000"/>
+              </a:lnSpc>
+              <a:spcBef>
+                <a:spcPts val="0"/>
+              </a:spcBef>
+              <a:spcAft>
+                <a:spcPts val="0"/>
+              </a:spcAft>
+              <a:buClr>
+                <a:srgbClr val="000000"/>
+              </a:buClr>
+              <a:buFont typeface="Arial"/>
+              <a:defRPr sz="1400" b="0" i="0" u="none" strike="noStrike" cap="none">
+                <a:solidFill>
+                  <a:srgbClr val="000000"/>
+                </a:solidFill>
+                <a:latin typeface="Arial"/>
+                <a:ea typeface="Arial"/>
+                <a:cs typeface="Arial"/>
+                <a:sym typeface="Arial"/>
+              </a:defRPr>
+            </a:lvl7pPr>
+            <a:lvl8pPr marR="0" lvl="7" algn="l" rtl="0">
+              <a:lnSpc>
+                <a:spcPct val="100000"/>
+              </a:lnSpc>
+              <a:spcBef>
+                <a:spcPts val="0"/>
+              </a:spcBef>
+              <a:spcAft>
+                <a:spcPts val="0"/>
+              </a:spcAft>
+              <a:buClr>
+                <a:srgbClr val="000000"/>
+              </a:buClr>
+              <a:buFont typeface="Arial"/>
+              <a:defRPr sz="1400" b="0" i="0" u="none" strike="noStrike" cap="none">
+                <a:solidFill>
+                  <a:srgbClr val="000000"/>
+                </a:solidFill>
+                <a:latin typeface="Arial"/>
+                <a:ea typeface="Arial"/>
+                <a:cs typeface="Arial"/>
+                <a:sym typeface="Arial"/>
+              </a:defRPr>
+            </a:lvl8pPr>
+            <a:lvl9pPr marR="0" lvl="8" algn="l" rtl="0">
+              <a:lnSpc>
+                <a:spcPct val="100000"/>
+              </a:lnSpc>
+              <a:spcBef>
+                <a:spcPts val="0"/>
+              </a:spcBef>
+              <a:spcAft>
+                <a:spcPts val="0"/>
+              </a:spcAft>
+              <a:buClr>
+                <a:srgbClr val="000000"/>
+              </a:buClr>
+              <a:buFont typeface="Arial"/>
+              <a:defRPr sz="1400" b="0" i="0" u="none" strike="noStrike" cap="none">
+                <a:solidFill>
+                  <a:srgbClr val="000000"/>
+                </a:solidFill>
+                <a:latin typeface="Arial"/>
+                <a:ea typeface="Arial"/>
+                <a:cs typeface="Arial"/>
+                <a:sym typeface="Arial"/>
+              </a:defRPr>
+            </a:lvl9pPr>
+          </a:lstStyle>
+          <a:p>
+            <a:pPr algn="ctr"/>
+            <a:r>
+              <a:rPr lang="en-GB" sz="2800" b="1"/>
+              <a:t>Demo Page</a:t>
+            </a:r>
+            <a:endParaRPr lang="en-GB" sz="2800" b="1" dirty="0"/>
+          </a:p>
+        </p:txBody>
+      </p:sp>
+      <p:sp>
+        <p:nvSpPr>
+          <p:cNvPr id="5" name="TextBox 4">
+            <a:extLst>
+              <a:ext uri="{FF2B5EF4-FFF2-40B4-BE49-F238E27FC236}">
+                <a16:creationId xmlns:a16="http://schemas.microsoft.com/office/drawing/2014/main" id="{050F7518-C539-64EA-0250-E5EB5D7E0B7A}"/>
               </a:ext>
             </a:extLst>
           </p:cNvPr>
@@ -4875,8 +5134,8 @@
         </p:nvSpPr>
         <p:spPr>
           <a:xfrm>
-            <a:off x="1684421" y="192505"/>
-            <a:ext cx="5500151" cy="584775"/>
+            <a:off x="1644492" y="854424"/>
+            <a:ext cx="7418800" cy="338554"/>
           </a:xfrm>
           <a:prstGeom prst="rect">
             <a:avLst/>
@@ -4890,58 +5149,17 @@
           <a:lstStyle/>
           <a:p>
             <a:r>
-              <a:rPr lang="en-US" sz="3200" b="1" dirty="0">
-                <a:latin typeface="Segoe UI" panose="020B0502040204020203" pitchFamily="34" charset="0"/>
-                <a:cs typeface="Segoe UI" panose="020B0502040204020203" pitchFamily="34" charset="0"/>
-              </a:rPr>
-              <a:t>Demo Header</a:t>
-            </a:r>
-            <a:endParaRPr lang="en-GB" sz="3200" b="1" dirty="0">
-              <a:latin typeface="Segoe UI" panose="020B0502040204020203" pitchFamily="34" charset="0"/>
-              <a:cs typeface="Segoe UI" panose="020B0502040204020203" pitchFamily="34" charset="0"/>
-            </a:endParaRPr>
-          </a:p>
-        </p:txBody>
-      </p:sp>
-      <p:sp>
-        <p:nvSpPr>
-          <p:cNvPr id="3" name="TextBox 2">
-            <a:extLst>
-              <a:ext uri="{FF2B5EF4-FFF2-40B4-BE49-F238E27FC236}">
-                <a16:creationId xmlns:a16="http://schemas.microsoft.com/office/drawing/2014/main" id="{FE4E9EC9-14B3-3556-A191-F6FEBFB97318}"/>
-              </a:ext>
-            </a:extLst>
-          </p:cNvPr>
-          <p:cNvSpPr txBox="1"/>
-          <p:nvPr/>
-        </p:nvSpPr>
-        <p:spPr>
-          <a:xfrm>
-            <a:off x="1760047" y="777280"/>
-            <a:ext cx="5500151" cy="338554"/>
-          </a:xfrm>
-          <a:prstGeom prst="rect">
-            <a:avLst/>
-          </a:prstGeom>
-          <a:noFill/>
-        </p:spPr>
-        <p:txBody>
-          <a:bodyPr wrap="square" rtlCol="0">
-            <a:spAutoFit/>
-          </a:bodyPr>
-          <a:lstStyle/>
-          <a:p>
-            <a:r>
-              <a:rPr lang="en-US" sz="1600" dirty="0">
-                <a:latin typeface="Segoe UI" panose="020B0502040204020203" pitchFamily="34" charset="0"/>
-                <a:cs typeface="Segoe UI" panose="020B0502040204020203" pitchFamily="34" charset="0"/>
+              <a:rPr lang="en-GB" sz="1600" dirty="0">
+                <a:solidFill>
+                  <a:srgbClr val="191919"/>
+                </a:solidFill>
+                <a:latin typeface="Albert Sans"/>
+                <a:ea typeface="Albert Sans"/>
+                <a:cs typeface="Albert Sans"/>
+                <a:sym typeface="Albert Sans"/>
               </a:rPr>
               <a:t>Demo Body</a:t>
             </a:r>
-            <a:endParaRPr lang="en-GB" sz="1600" dirty="0">
-              <a:latin typeface="Segoe UI" panose="020B0502040204020203" pitchFamily="34" charset="0"/>
-              <a:cs typeface="Segoe UI" panose="020B0502040204020203" pitchFamily="34" charset="0"/>
-            </a:endParaRPr>
           </a:p>
         </p:txBody>
       </p:sp>

--- a/template1.pptx
+++ b/template1.pptx
@@ -20,6 +20,10 @@
       <p:bold r:id="rId6"/>
       <p:italic r:id="rId7"/>
       <p:boldItalic r:id="rId8"/>
+    </p:embeddedFont>
+    <p:embeddedFont>
+      <p:font typeface="Nunito Light" pitchFamily="2" charset="0"/>
+      <p:regular r:id="rId9"/>
     </p:embeddedFont>
   </p:embeddedFontLst>
   <p:defaultTextStyle>
@@ -825,6 +829,110 @@
 </p:notes>
 </file>
 
+<file path=ppt/notesSlides/notesSlide2.xml><?xml version="1.0" encoding="utf-8"?>
+<p:notes xmlns:a="http://schemas.openxmlformats.org/drawingml/2006/main" xmlns:r="http://schemas.openxmlformats.org/officeDocument/2006/relationships" xmlns:p="http://schemas.openxmlformats.org/presentationml/2006/main" showMasterSp="0" showMasterPhAnim="0">
+  <p:cSld>
+    <p:spTree>
+      <p:nvGrpSpPr>
+        <p:cNvPr id="1" name="Shape 298"/>
+        <p:cNvGrpSpPr/>
+        <p:nvPr/>
+      </p:nvGrpSpPr>
+      <p:grpSpPr>
+        <a:xfrm>
+          <a:off x="0" y="0"/>
+          <a:ext cx="0" cy="0"/>
+          <a:chOff x="0" y="0"/>
+          <a:chExt cx="0" cy="0"/>
+        </a:xfrm>
+      </p:grpSpPr>
+      <p:sp>
+        <p:nvSpPr>
+          <p:cNvPr id="299" name="Google Shape;299;gd431007ba2_0_208:notes"/>
+          <p:cNvSpPr>
+            <a:spLocks noGrp="1" noRot="1" noChangeAspect="1"/>
+          </p:cNvSpPr>
+          <p:nvPr>
+            <p:ph type="sldImg" idx="2"/>
+          </p:nvPr>
+        </p:nvSpPr>
+        <p:spPr>
+          <a:xfrm>
+            <a:off x="381000" y="685800"/>
+            <a:ext cx="6096000" cy="3429000"/>
+          </a:xfrm>
+          <a:custGeom>
+            <a:avLst/>
+            <a:gdLst/>
+            <a:ahLst/>
+            <a:cxnLst/>
+            <a:rect l="l" t="t" r="r" b="b"/>
+            <a:pathLst>
+              <a:path w="120000" h="120000" extrusionOk="0">
+                <a:moveTo>
+                  <a:pt x="0" y="0"/>
+                </a:moveTo>
+                <a:lnTo>
+                  <a:pt x="120000" y="0"/>
+                </a:lnTo>
+                <a:lnTo>
+                  <a:pt x="120000" y="120000"/>
+                </a:lnTo>
+                <a:lnTo>
+                  <a:pt x="0" y="120000"/>
+                </a:lnTo>
+                <a:close/>
+              </a:path>
+            </a:pathLst>
+          </a:custGeom>
+        </p:spPr>
+      </p:sp>
+      <p:sp>
+        <p:nvSpPr>
+          <p:cNvPr id="300" name="Google Shape;300;gd431007ba2_0_208:notes"/>
+          <p:cNvSpPr txBox="1">
+            <a:spLocks noGrp="1"/>
+          </p:cNvSpPr>
+          <p:nvPr>
+            <p:ph type="body" idx="1"/>
+          </p:nvPr>
+        </p:nvSpPr>
+        <p:spPr>
+          <a:xfrm>
+            <a:off x="685800" y="4343400"/>
+            <a:ext cx="5486400" cy="4114800"/>
+          </a:xfrm>
+          <a:prstGeom prst="rect">
+            <a:avLst/>
+          </a:prstGeom>
+        </p:spPr>
+        <p:txBody>
+          <a:bodyPr spcFirstLastPara="1" wrap="square" lIns="91425" tIns="91425" rIns="91425" bIns="91425" anchor="t" anchorCtr="0">
+            <a:noAutofit/>
+          </a:bodyPr>
+          <a:lstStyle/>
+          <a:p>
+            <a:pPr marL="0" lvl="0" indent="0" algn="l" rtl="0">
+              <a:spcBef>
+                <a:spcPts val="0"/>
+              </a:spcBef>
+              <a:spcAft>
+                <a:spcPts val="0"/>
+              </a:spcAft>
+              <a:buNone/>
+            </a:pPr>
+            <a:endParaRPr/>
+          </a:p>
+        </p:txBody>
+      </p:sp>
+    </p:spTree>
+  </p:cSld>
+  <p:clrMapOvr>
+    <a:masterClrMapping/>
+  </p:clrMapOvr>
+</p:notes>
+</file>
+
 <file path=ppt/slideLayouts/slideLayout1.xml><?xml version="1.0" encoding="utf-8"?>
 <p:sldLayout xmlns:a="http://schemas.openxmlformats.org/drawingml/2006/main" xmlns:r="http://schemas.openxmlformats.org/officeDocument/2006/relationships" xmlns:p="http://schemas.openxmlformats.org/presentationml/2006/main" matchingName="Title slide" type="title">
   <p:cSld name="TITLE">
@@ -1202,6 +1310,1437 @@
 </file>
 
 <file path=ppt/slideLayouts/slideLayout2.xml><?xml version="1.0" encoding="utf-8"?>
+<p:sldLayout xmlns:a="http://schemas.openxmlformats.org/drawingml/2006/main" xmlns:r="http://schemas.openxmlformats.org/officeDocument/2006/relationships" xmlns:p="http://schemas.openxmlformats.org/presentationml/2006/main" matchingName="Title and body" type="tx">
+  <p:cSld name="TITLE_AND_BODY">
+    <p:spTree>
+      <p:nvGrpSpPr>
+        <p:cNvPr id="1" name="Shape 21"/>
+        <p:cNvGrpSpPr/>
+        <p:nvPr/>
+      </p:nvGrpSpPr>
+      <p:grpSpPr>
+        <a:xfrm>
+          <a:off x="0" y="0"/>
+          <a:ext cx="0" cy="0"/>
+          <a:chOff x="0" y="0"/>
+          <a:chExt cx="0" cy="0"/>
+        </a:xfrm>
+      </p:grpSpPr>
+      <p:sp>
+        <p:nvSpPr>
+          <p:cNvPr id="22" name="Google Shape;22;p4"/>
+          <p:cNvSpPr txBox="1">
+            <a:spLocks noGrp="1"/>
+          </p:cNvSpPr>
+          <p:nvPr>
+            <p:ph type="title"/>
+          </p:nvPr>
+        </p:nvSpPr>
+        <p:spPr>
+          <a:xfrm>
+            <a:off x="720000" y="445025"/>
+            <a:ext cx="7704000" cy="572700"/>
+          </a:xfrm>
+          <a:prstGeom prst="rect">
+            <a:avLst/>
+          </a:prstGeom>
+        </p:spPr>
+        <p:txBody>
+          <a:bodyPr spcFirstLastPara="1" wrap="square" lIns="91425" tIns="91425" rIns="91425" bIns="91425" anchor="t" anchorCtr="0">
+            <a:noAutofit/>
+          </a:bodyPr>
+          <a:lstStyle>
+            <a:lvl1pPr lvl="0" algn="ctr" rtl="0">
+              <a:spcBef>
+                <a:spcPts val="0"/>
+              </a:spcBef>
+              <a:spcAft>
+                <a:spcPts val="0"/>
+              </a:spcAft>
+              <a:buSzPts val="3500"/>
+              <a:buNone/>
+              <a:defRPr/>
+            </a:lvl1pPr>
+            <a:lvl2pPr lvl="1" rtl="0">
+              <a:spcBef>
+                <a:spcPts val="0"/>
+              </a:spcBef>
+              <a:spcAft>
+                <a:spcPts val="0"/>
+              </a:spcAft>
+              <a:buSzPts val="3500"/>
+              <a:buNone/>
+              <a:defRPr/>
+            </a:lvl2pPr>
+            <a:lvl3pPr lvl="2" rtl="0">
+              <a:spcBef>
+                <a:spcPts val="0"/>
+              </a:spcBef>
+              <a:spcAft>
+                <a:spcPts val="0"/>
+              </a:spcAft>
+              <a:buSzPts val="3500"/>
+              <a:buNone/>
+              <a:defRPr/>
+            </a:lvl3pPr>
+            <a:lvl4pPr lvl="3" rtl="0">
+              <a:spcBef>
+                <a:spcPts val="0"/>
+              </a:spcBef>
+              <a:spcAft>
+                <a:spcPts val="0"/>
+              </a:spcAft>
+              <a:buSzPts val="3500"/>
+              <a:buNone/>
+              <a:defRPr/>
+            </a:lvl4pPr>
+            <a:lvl5pPr lvl="4" rtl="0">
+              <a:spcBef>
+                <a:spcPts val="0"/>
+              </a:spcBef>
+              <a:spcAft>
+                <a:spcPts val="0"/>
+              </a:spcAft>
+              <a:buSzPts val="3500"/>
+              <a:buNone/>
+              <a:defRPr/>
+            </a:lvl5pPr>
+            <a:lvl6pPr lvl="5" rtl="0">
+              <a:spcBef>
+                <a:spcPts val="0"/>
+              </a:spcBef>
+              <a:spcAft>
+                <a:spcPts val="0"/>
+              </a:spcAft>
+              <a:buSzPts val="3500"/>
+              <a:buNone/>
+              <a:defRPr/>
+            </a:lvl6pPr>
+            <a:lvl7pPr lvl="6" rtl="0">
+              <a:spcBef>
+                <a:spcPts val="0"/>
+              </a:spcBef>
+              <a:spcAft>
+                <a:spcPts val="0"/>
+              </a:spcAft>
+              <a:buSzPts val="3500"/>
+              <a:buNone/>
+              <a:defRPr/>
+            </a:lvl7pPr>
+            <a:lvl8pPr lvl="7" rtl="0">
+              <a:spcBef>
+                <a:spcPts val="0"/>
+              </a:spcBef>
+              <a:spcAft>
+                <a:spcPts val="0"/>
+              </a:spcAft>
+              <a:buSzPts val="3500"/>
+              <a:buNone/>
+              <a:defRPr/>
+            </a:lvl8pPr>
+            <a:lvl9pPr lvl="8" rtl="0">
+              <a:spcBef>
+                <a:spcPts val="0"/>
+              </a:spcBef>
+              <a:spcAft>
+                <a:spcPts val="0"/>
+              </a:spcAft>
+              <a:buSzPts val="3500"/>
+              <a:buNone/>
+              <a:defRPr/>
+            </a:lvl9pPr>
+          </a:lstStyle>
+          <a:p>
+            <a:endParaRPr/>
+          </a:p>
+        </p:txBody>
+      </p:sp>
+      <p:sp>
+        <p:nvSpPr>
+          <p:cNvPr id="23" name="Google Shape;23;p4"/>
+          <p:cNvSpPr txBox="1">
+            <a:spLocks noGrp="1"/>
+          </p:cNvSpPr>
+          <p:nvPr>
+            <p:ph type="body" idx="1"/>
+          </p:nvPr>
+        </p:nvSpPr>
+        <p:spPr>
+          <a:xfrm>
+            <a:off x="720000" y="1269175"/>
+            <a:ext cx="7704000" cy="399000"/>
+          </a:xfrm>
+          <a:prstGeom prst="rect">
+            <a:avLst/>
+          </a:prstGeom>
+        </p:spPr>
+        <p:txBody>
+          <a:bodyPr spcFirstLastPara="1" wrap="square" lIns="91425" tIns="91425" rIns="91425" bIns="91425" anchor="t" anchorCtr="0">
+            <a:noAutofit/>
+          </a:bodyPr>
+          <a:lstStyle>
+            <a:lvl1pPr marL="457200" lvl="0" indent="-317500" algn="ctr" rtl="0">
+              <a:lnSpc>
+                <a:spcPct val="100000"/>
+              </a:lnSpc>
+              <a:spcBef>
+                <a:spcPts val="0"/>
+              </a:spcBef>
+              <a:spcAft>
+                <a:spcPts val="0"/>
+              </a:spcAft>
+              <a:buSzPts val="1400"/>
+              <a:buFont typeface="Nunito Light"/>
+              <a:buChar char="●"/>
+              <a:defRPr sz="1200"/>
+            </a:lvl1pPr>
+            <a:lvl2pPr marL="914400" lvl="1" indent="-317500" rtl="0">
+              <a:lnSpc>
+                <a:spcPct val="100000"/>
+              </a:lnSpc>
+              <a:spcBef>
+                <a:spcPts val="0"/>
+              </a:spcBef>
+              <a:spcAft>
+                <a:spcPts val="0"/>
+              </a:spcAft>
+              <a:buSzPts val="1400"/>
+              <a:buFont typeface="Nunito Light"/>
+              <a:buChar char="○"/>
+              <a:defRPr/>
+            </a:lvl2pPr>
+            <a:lvl3pPr marL="1371600" lvl="2" indent="-317500" rtl="0">
+              <a:lnSpc>
+                <a:spcPct val="100000"/>
+              </a:lnSpc>
+              <a:spcBef>
+                <a:spcPts val="0"/>
+              </a:spcBef>
+              <a:spcAft>
+                <a:spcPts val="0"/>
+              </a:spcAft>
+              <a:buSzPts val="1400"/>
+              <a:buFont typeface="Nunito Light"/>
+              <a:buChar char="■"/>
+              <a:defRPr/>
+            </a:lvl3pPr>
+            <a:lvl4pPr marL="1828800" lvl="3" indent="-317500" rtl="0">
+              <a:lnSpc>
+                <a:spcPct val="100000"/>
+              </a:lnSpc>
+              <a:spcBef>
+                <a:spcPts val="0"/>
+              </a:spcBef>
+              <a:spcAft>
+                <a:spcPts val="0"/>
+              </a:spcAft>
+              <a:buSzPts val="1400"/>
+              <a:buFont typeface="Nunito Light"/>
+              <a:buChar char="●"/>
+              <a:defRPr/>
+            </a:lvl4pPr>
+            <a:lvl5pPr marL="2286000" lvl="4" indent="-317500" rtl="0">
+              <a:lnSpc>
+                <a:spcPct val="100000"/>
+              </a:lnSpc>
+              <a:spcBef>
+                <a:spcPts val="0"/>
+              </a:spcBef>
+              <a:spcAft>
+                <a:spcPts val="0"/>
+              </a:spcAft>
+              <a:buSzPts val="1400"/>
+              <a:buFont typeface="Nunito Light"/>
+              <a:buChar char="○"/>
+              <a:defRPr/>
+            </a:lvl5pPr>
+            <a:lvl6pPr marL="2743200" lvl="5" indent="-317500" rtl="0">
+              <a:lnSpc>
+                <a:spcPct val="100000"/>
+              </a:lnSpc>
+              <a:spcBef>
+                <a:spcPts val="0"/>
+              </a:spcBef>
+              <a:spcAft>
+                <a:spcPts val="0"/>
+              </a:spcAft>
+              <a:buSzPts val="1400"/>
+              <a:buFont typeface="Nunito Light"/>
+              <a:buChar char="■"/>
+              <a:defRPr/>
+            </a:lvl6pPr>
+            <a:lvl7pPr marL="3200400" lvl="6" indent="-317500" rtl="0">
+              <a:lnSpc>
+                <a:spcPct val="100000"/>
+              </a:lnSpc>
+              <a:spcBef>
+                <a:spcPts val="0"/>
+              </a:spcBef>
+              <a:spcAft>
+                <a:spcPts val="0"/>
+              </a:spcAft>
+              <a:buSzPts val="1400"/>
+              <a:buFont typeface="Nunito Light"/>
+              <a:buChar char="●"/>
+              <a:defRPr/>
+            </a:lvl7pPr>
+            <a:lvl8pPr marL="3657600" lvl="7" indent="-317500" rtl="0">
+              <a:lnSpc>
+                <a:spcPct val="100000"/>
+              </a:lnSpc>
+              <a:spcBef>
+                <a:spcPts val="0"/>
+              </a:spcBef>
+              <a:spcAft>
+                <a:spcPts val="0"/>
+              </a:spcAft>
+              <a:buSzPts val="1400"/>
+              <a:buFont typeface="Nunito Light"/>
+              <a:buChar char="○"/>
+              <a:defRPr/>
+            </a:lvl8pPr>
+            <a:lvl9pPr marL="4114800" lvl="8" indent="-317500" rtl="0">
+              <a:lnSpc>
+                <a:spcPct val="100000"/>
+              </a:lnSpc>
+              <a:spcBef>
+                <a:spcPts val="0"/>
+              </a:spcBef>
+              <a:spcAft>
+                <a:spcPts val="0"/>
+              </a:spcAft>
+              <a:buSzPts val="1400"/>
+              <a:buFont typeface="Nunito Light"/>
+              <a:buChar char="■"/>
+              <a:defRPr/>
+            </a:lvl9pPr>
+          </a:lstStyle>
+          <a:p>
+            <a:endParaRPr/>
+          </a:p>
+        </p:txBody>
+      </p:sp>
+      <p:grpSp>
+        <p:nvGrpSpPr>
+          <p:cNvPr id="24" name="Google Shape;24;p4"/>
+          <p:cNvGrpSpPr/>
+          <p:nvPr/>
+        </p:nvGrpSpPr>
+        <p:grpSpPr>
+          <a:xfrm>
+            <a:off x="7845966" y="4050781"/>
+            <a:ext cx="1775083" cy="1748694"/>
+            <a:chOff x="4757800" y="3823757"/>
+            <a:chExt cx="2394232" cy="2358638"/>
+          </a:xfrm>
+        </p:grpSpPr>
+        <p:grpSp>
+          <p:nvGrpSpPr>
+            <p:cNvPr id="25" name="Google Shape;25;p4"/>
+            <p:cNvGrpSpPr/>
+            <p:nvPr/>
+          </p:nvGrpSpPr>
+          <p:grpSpPr>
+            <a:xfrm rot="2700000">
+              <a:off x="4974332" y="4166770"/>
+              <a:ext cx="1045765" cy="1045615"/>
+              <a:chOff x="3741950" y="353925"/>
+              <a:chExt cx="1045775" cy="1045625"/>
+            </a:xfrm>
+          </p:grpSpPr>
+          <p:sp>
+            <p:nvSpPr>
+              <p:cNvPr id="26" name="Google Shape;26;p4"/>
+              <p:cNvSpPr/>
+              <p:nvPr/>
+            </p:nvSpPr>
+            <p:spPr>
+              <a:xfrm>
+                <a:off x="3741950" y="1372675"/>
+                <a:ext cx="26325" cy="26875"/>
+              </a:xfrm>
+              <a:custGeom>
+                <a:avLst/>
+                <a:gdLst/>
+                <a:ahLst/>
+                <a:cxnLst/>
+                <a:rect l="l" t="t" r="r" b="b"/>
+                <a:pathLst>
+                  <a:path w="1053" h="1075" extrusionOk="0">
+                    <a:moveTo>
+                      <a:pt x="526" y="1"/>
+                    </a:moveTo>
+                    <a:cubicBezTo>
+                      <a:pt x="491" y="1"/>
+                      <a:pt x="455" y="8"/>
+                      <a:pt x="427" y="22"/>
+                    </a:cubicBezTo>
+                    <a:cubicBezTo>
+                      <a:pt x="398" y="22"/>
+                      <a:pt x="370" y="22"/>
+                      <a:pt x="313" y="50"/>
+                    </a:cubicBezTo>
+                    <a:cubicBezTo>
+                      <a:pt x="284" y="50"/>
+                      <a:pt x="256" y="79"/>
+                      <a:pt x="228" y="107"/>
+                    </a:cubicBezTo>
+                    <a:cubicBezTo>
+                      <a:pt x="199" y="107"/>
+                      <a:pt x="171" y="136"/>
+                      <a:pt x="142" y="164"/>
+                    </a:cubicBezTo>
+                    <a:cubicBezTo>
+                      <a:pt x="57" y="249"/>
+                      <a:pt x="0" y="392"/>
+                      <a:pt x="0" y="534"/>
+                    </a:cubicBezTo>
+                    <a:cubicBezTo>
+                      <a:pt x="0" y="676"/>
+                      <a:pt x="57" y="818"/>
+                      <a:pt x="142" y="903"/>
+                    </a:cubicBezTo>
+                    <a:cubicBezTo>
+                      <a:pt x="171" y="932"/>
+                      <a:pt x="199" y="960"/>
+                      <a:pt x="228" y="989"/>
+                    </a:cubicBezTo>
+                    <a:cubicBezTo>
+                      <a:pt x="256" y="989"/>
+                      <a:pt x="284" y="1017"/>
+                      <a:pt x="313" y="1046"/>
+                    </a:cubicBezTo>
+                    <a:cubicBezTo>
+                      <a:pt x="370" y="1046"/>
+                      <a:pt x="398" y="1046"/>
+                      <a:pt x="427" y="1074"/>
+                    </a:cubicBezTo>
+                    <a:lnTo>
+                      <a:pt x="626" y="1074"/>
+                    </a:lnTo>
+                    <a:cubicBezTo>
+                      <a:pt x="654" y="1046"/>
+                      <a:pt x="711" y="1046"/>
+                      <a:pt x="739" y="1046"/>
+                    </a:cubicBezTo>
+                    <a:cubicBezTo>
+                      <a:pt x="768" y="1017"/>
+                      <a:pt x="796" y="989"/>
+                      <a:pt x="825" y="989"/>
+                    </a:cubicBezTo>
+                    <a:cubicBezTo>
+                      <a:pt x="853" y="960"/>
+                      <a:pt x="882" y="932"/>
+                      <a:pt x="910" y="903"/>
+                    </a:cubicBezTo>
+                    <a:cubicBezTo>
+                      <a:pt x="938" y="903"/>
+                      <a:pt x="938" y="875"/>
+                      <a:pt x="967" y="847"/>
+                    </a:cubicBezTo>
+                    <a:cubicBezTo>
+                      <a:pt x="995" y="818"/>
+                      <a:pt x="995" y="790"/>
+                      <a:pt x="1024" y="733"/>
+                    </a:cubicBezTo>
+                    <a:cubicBezTo>
+                      <a:pt x="1024" y="704"/>
+                      <a:pt x="1052" y="676"/>
+                      <a:pt x="1052" y="648"/>
+                    </a:cubicBezTo>
+                    <a:cubicBezTo>
+                      <a:pt x="1052" y="619"/>
+                      <a:pt x="1052" y="562"/>
+                      <a:pt x="1052" y="534"/>
+                    </a:cubicBezTo>
+                    <a:cubicBezTo>
+                      <a:pt x="1052" y="392"/>
+                      <a:pt x="995" y="249"/>
+                      <a:pt x="910" y="164"/>
+                    </a:cubicBezTo>
+                    <a:cubicBezTo>
+                      <a:pt x="882" y="136"/>
+                      <a:pt x="853" y="107"/>
+                      <a:pt x="825" y="107"/>
+                    </a:cubicBezTo>
+                    <a:cubicBezTo>
+                      <a:pt x="796" y="79"/>
+                      <a:pt x="768" y="50"/>
+                      <a:pt x="739" y="50"/>
+                    </a:cubicBezTo>
+                    <a:cubicBezTo>
+                      <a:pt x="711" y="22"/>
+                      <a:pt x="654" y="22"/>
+                      <a:pt x="626" y="22"/>
+                    </a:cubicBezTo>
+                    <a:cubicBezTo>
+                      <a:pt x="597" y="8"/>
+                      <a:pt x="562" y="1"/>
+                      <a:pt x="526" y="1"/>
+                    </a:cubicBezTo>
+                    <a:close/>
+                  </a:path>
+                </a:pathLst>
+              </a:custGeom>
+              <a:solidFill>
+                <a:schemeClr val="accent3"/>
+              </a:solidFill>
+              <a:ln>
+                <a:noFill/>
+              </a:ln>
+            </p:spPr>
+            <p:txBody>
+              <a:bodyPr spcFirstLastPara="1" wrap="square" lIns="91425" tIns="91425" rIns="91425" bIns="91425" anchor="ctr" anchorCtr="0">
+                <a:noAutofit/>
+              </a:bodyPr>
+              <a:lstStyle/>
+              <a:p>
+                <a:pPr marL="0" lvl="0" indent="0" algn="l" rtl="0">
+                  <a:spcBef>
+                    <a:spcPts val="0"/>
+                  </a:spcBef>
+                  <a:spcAft>
+                    <a:spcPts val="0"/>
+                  </a:spcAft>
+                  <a:buNone/>
+                </a:pPr>
+                <a:endParaRPr/>
+              </a:p>
+            </p:txBody>
+          </p:sp>
+          <p:sp>
+            <p:nvSpPr>
+              <p:cNvPr id="27" name="Google Shape;27;p4"/>
+              <p:cNvSpPr/>
+              <p:nvPr/>
+            </p:nvSpPr>
+            <p:spPr>
+              <a:xfrm>
+                <a:off x="3804500" y="417550"/>
+                <a:ext cx="920650" cy="918000"/>
+              </a:xfrm>
+              <a:custGeom>
+                <a:avLst/>
+                <a:gdLst/>
+                <a:ahLst/>
+                <a:cxnLst/>
+                <a:rect l="l" t="t" r="r" b="b"/>
+                <a:pathLst>
+                  <a:path w="36826" h="36720" extrusionOk="0">
+                    <a:moveTo>
+                      <a:pt x="36232" y="1"/>
+                    </a:moveTo>
+                    <a:cubicBezTo>
+                      <a:pt x="36094" y="1"/>
+                      <a:pt x="35959" y="51"/>
+                      <a:pt x="35859" y="150"/>
+                    </a:cubicBezTo>
+                    <a:cubicBezTo>
+                      <a:pt x="35660" y="378"/>
+                      <a:pt x="35660" y="690"/>
+                      <a:pt x="35859" y="918"/>
+                    </a:cubicBezTo>
+                    <a:cubicBezTo>
+                      <a:pt x="35973" y="1003"/>
+                      <a:pt x="36115" y="1060"/>
+                      <a:pt x="36229" y="1060"/>
+                    </a:cubicBezTo>
+                    <a:cubicBezTo>
+                      <a:pt x="36371" y="1060"/>
+                      <a:pt x="36513" y="1003"/>
+                      <a:pt x="36627" y="918"/>
+                    </a:cubicBezTo>
+                    <a:cubicBezTo>
+                      <a:pt x="36826" y="690"/>
+                      <a:pt x="36826" y="378"/>
+                      <a:pt x="36627" y="150"/>
+                    </a:cubicBezTo>
+                    <a:cubicBezTo>
+                      <a:pt x="36513" y="51"/>
+                      <a:pt x="36371" y="1"/>
+                      <a:pt x="36232" y="1"/>
+                    </a:cubicBezTo>
+                    <a:close/>
+                    <a:moveTo>
+                      <a:pt x="33694" y="2560"/>
+                    </a:moveTo>
+                    <a:cubicBezTo>
+                      <a:pt x="33556" y="2560"/>
+                      <a:pt x="33414" y="2610"/>
+                      <a:pt x="33300" y="2709"/>
+                    </a:cubicBezTo>
+                    <a:cubicBezTo>
+                      <a:pt x="33101" y="2909"/>
+                      <a:pt x="33101" y="3250"/>
+                      <a:pt x="33300" y="3449"/>
+                    </a:cubicBezTo>
+                    <a:cubicBezTo>
+                      <a:pt x="33414" y="3563"/>
+                      <a:pt x="33556" y="3619"/>
+                      <a:pt x="33698" y="3619"/>
+                    </a:cubicBezTo>
+                    <a:cubicBezTo>
+                      <a:pt x="33840" y="3619"/>
+                      <a:pt x="33954" y="3563"/>
+                      <a:pt x="34068" y="3449"/>
+                    </a:cubicBezTo>
+                    <a:cubicBezTo>
+                      <a:pt x="34267" y="3250"/>
+                      <a:pt x="34267" y="2909"/>
+                      <a:pt x="34068" y="2709"/>
+                    </a:cubicBezTo>
+                    <a:cubicBezTo>
+                      <a:pt x="33968" y="2610"/>
+                      <a:pt x="33833" y="2560"/>
+                      <a:pt x="33694" y="2560"/>
+                    </a:cubicBezTo>
+                    <a:close/>
+                    <a:moveTo>
+                      <a:pt x="31139" y="5091"/>
+                    </a:moveTo>
+                    <a:cubicBezTo>
+                      <a:pt x="31004" y="5091"/>
+                      <a:pt x="30869" y="5141"/>
+                      <a:pt x="30769" y="5240"/>
+                    </a:cubicBezTo>
+                    <a:cubicBezTo>
+                      <a:pt x="30570" y="5468"/>
+                      <a:pt x="30570" y="5809"/>
+                      <a:pt x="30769" y="6008"/>
+                    </a:cubicBezTo>
+                    <a:cubicBezTo>
+                      <a:pt x="30883" y="6122"/>
+                      <a:pt x="30996" y="6150"/>
+                      <a:pt x="31139" y="6150"/>
+                    </a:cubicBezTo>
+                    <a:cubicBezTo>
+                      <a:pt x="31281" y="6150"/>
+                      <a:pt x="31423" y="6122"/>
+                      <a:pt x="31508" y="6008"/>
+                    </a:cubicBezTo>
+                    <a:cubicBezTo>
+                      <a:pt x="31736" y="5809"/>
+                      <a:pt x="31736" y="5468"/>
+                      <a:pt x="31508" y="5240"/>
+                    </a:cubicBezTo>
+                    <a:cubicBezTo>
+                      <a:pt x="31409" y="5141"/>
+                      <a:pt x="31274" y="5091"/>
+                      <a:pt x="31139" y="5091"/>
+                    </a:cubicBezTo>
+                    <a:close/>
+                    <a:moveTo>
+                      <a:pt x="28594" y="7650"/>
+                    </a:moveTo>
+                    <a:cubicBezTo>
+                      <a:pt x="28458" y="7650"/>
+                      <a:pt x="28323" y="7700"/>
+                      <a:pt x="28210" y="7800"/>
+                    </a:cubicBezTo>
+                    <a:cubicBezTo>
+                      <a:pt x="28011" y="7999"/>
+                      <a:pt x="28011" y="8340"/>
+                      <a:pt x="28210" y="8567"/>
+                    </a:cubicBezTo>
+                    <a:cubicBezTo>
+                      <a:pt x="28323" y="8653"/>
+                      <a:pt x="28466" y="8710"/>
+                      <a:pt x="28608" y="8710"/>
+                    </a:cubicBezTo>
+                    <a:cubicBezTo>
+                      <a:pt x="28722" y="8710"/>
+                      <a:pt x="28864" y="8653"/>
+                      <a:pt x="28977" y="8567"/>
+                    </a:cubicBezTo>
+                    <a:cubicBezTo>
+                      <a:pt x="29177" y="8340"/>
+                      <a:pt x="29177" y="7999"/>
+                      <a:pt x="28977" y="7800"/>
+                    </a:cubicBezTo>
+                    <a:cubicBezTo>
+                      <a:pt x="28864" y="7700"/>
+                      <a:pt x="28729" y="7650"/>
+                      <a:pt x="28594" y="7650"/>
+                    </a:cubicBezTo>
+                    <a:close/>
+                    <a:moveTo>
+                      <a:pt x="26048" y="10188"/>
+                    </a:moveTo>
+                    <a:cubicBezTo>
+                      <a:pt x="25913" y="10188"/>
+                      <a:pt x="25778" y="10245"/>
+                      <a:pt x="25679" y="10359"/>
+                    </a:cubicBezTo>
+                    <a:cubicBezTo>
+                      <a:pt x="25451" y="10558"/>
+                      <a:pt x="25451" y="10899"/>
+                      <a:pt x="25679" y="11098"/>
+                    </a:cubicBezTo>
+                    <a:cubicBezTo>
+                      <a:pt x="25764" y="11212"/>
+                      <a:pt x="25906" y="11269"/>
+                      <a:pt x="26048" y="11269"/>
+                    </a:cubicBezTo>
+                    <a:cubicBezTo>
+                      <a:pt x="26191" y="11269"/>
+                      <a:pt x="26333" y="11212"/>
+                      <a:pt x="26418" y="11098"/>
+                    </a:cubicBezTo>
+                    <a:cubicBezTo>
+                      <a:pt x="26646" y="10899"/>
+                      <a:pt x="26646" y="10558"/>
+                      <a:pt x="26418" y="10359"/>
+                    </a:cubicBezTo>
+                    <a:cubicBezTo>
+                      <a:pt x="26319" y="10245"/>
+                      <a:pt x="26184" y="10188"/>
+                      <a:pt x="26048" y="10188"/>
+                    </a:cubicBezTo>
+                    <a:close/>
+                    <a:moveTo>
+                      <a:pt x="23493" y="12741"/>
+                    </a:moveTo>
+                    <a:cubicBezTo>
+                      <a:pt x="23354" y="12741"/>
+                      <a:pt x="23219" y="12790"/>
+                      <a:pt x="23120" y="12890"/>
+                    </a:cubicBezTo>
+                    <a:cubicBezTo>
+                      <a:pt x="22920" y="13089"/>
+                      <a:pt x="22920" y="13430"/>
+                      <a:pt x="23120" y="13658"/>
+                    </a:cubicBezTo>
+                    <a:cubicBezTo>
+                      <a:pt x="23233" y="13743"/>
+                      <a:pt x="23375" y="13800"/>
+                      <a:pt x="23489" y="13800"/>
+                    </a:cubicBezTo>
+                    <a:cubicBezTo>
+                      <a:pt x="23631" y="13800"/>
+                      <a:pt x="23774" y="13743"/>
+                      <a:pt x="23887" y="13658"/>
+                    </a:cubicBezTo>
+                    <a:cubicBezTo>
+                      <a:pt x="24086" y="13430"/>
+                      <a:pt x="24086" y="13089"/>
+                      <a:pt x="23887" y="12890"/>
+                    </a:cubicBezTo>
+                    <a:cubicBezTo>
+                      <a:pt x="23774" y="12790"/>
+                      <a:pt x="23631" y="12741"/>
+                      <a:pt x="23493" y="12741"/>
+                    </a:cubicBezTo>
+                    <a:close/>
+                    <a:moveTo>
+                      <a:pt x="20958" y="15278"/>
+                    </a:moveTo>
+                    <a:cubicBezTo>
+                      <a:pt x="20823" y="15278"/>
+                      <a:pt x="20688" y="15335"/>
+                      <a:pt x="20589" y="15449"/>
+                    </a:cubicBezTo>
+                    <a:cubicBezTo>
+                      <a:pt x="20361" y="15648"/>
+                      <a:pt x="20361" y="15989"/>
+                      <a:pt x="20589" y="16188"/>
+                    </a:cubicBezTo>
+                    <a:cubicBezTo>
+                      <a:pt x="20674" y="16302"/>
+                      <a:pt x="20816" y="16359"/>
+                      <a:pt x="20958" y="16359"/>
+                    </a:cubicBezTo>
+                    <a:cubicBezTo>
+                      <a:pt x="21101" y="16359"/>
+                      <a:pt x="21214" y="16302"/>
+                      <a:pt x="21328" y="16188"/>
+                    </a:cubicBezTo>
+                    <a:cubicBezTo>
+                      <a:pt x="21527" y="15989"/>
+                      <a:pt x="21527" y="15648"/>
+                      <a:pt x="21328" y="15449"/>
+                    </a:cubicBezTo>
+                    <a:cubicBezTo>
+                      <a:pt x="21228" y="15335"/>
+                      <a:pt x="21093" y="15278"/>
+                      <a:pt x="20958" y="15278"/>
+                    </a:cubicBezTo>
+                    <a:close/>
+                    <a:moveTo>
+                      <a:pt x="18399" y="17831"/>
+                    </a:moveTo>
+                    <a:cubicBezTo>
+                      <a:pt x="18264" y="17831"/>
+                      <a:pt x="18129" y="17880"/>
+                      <a:pt x="18029" y="17980"/>
+                    </a:cubicBezTo>
+                    <a:cubicBezTo>
+                      <a:pt x="17830" y="18207"/>
+                      <a:pt x="17830" y="18549"/>
+                      <a:pt x="18029" y="18748"/>
+                    </a:cubicBezTo>
+                    <a:cubicBezTo>
+                      <a:pt x="18143" y="18833"/>
+                      <a:pt x="18257" y="18890"/>
+                      <a:pt x="18399" y="18890"/>
+                    </a:cubicBezTo>
+                    <a:cubicBezTo>
+                      <a:pt x="18541" y="18890"/>
+                      <a:pt x="18683" y="18833"/>
+                      <a:pt x="18769" y="18748"/>
+                    </a:cubicBezTo>
+                    <a:cubicBezTo>
+                      <a:pt x="18996" y="18549"/>
+                      <a:pt x="18996" y="18207"/>
+                      <a:pt x="18769" y="17980"/>
+                    </a:cubicBezTo>
+                    <a:cubicBezTo>
+                      <a:pt x="18669" y="17880"/>
+                      <a:pt x="18534" y="17831"/>
+                      <a:pt x="18399" y="17831"/>
+                    </a:cubicBezTo>
+                    <a:close/>
+                    <a:moveTo>
+                      <a:pt x="15865" y="20390"/>
+                    </a:moveTo>
+                    <a:cubicBezTo>
+                      <a:pt x="15726" y="20390"/>
+                      <a:pt x="15584" y="20440"/>
+                      <a:pt x="15470" y="20539"/>
+                    </a:cubicBezTo>
+                    <a:cubicBezTo>
+                      <a:pt x="15271" y="20738"/>
+                      <a:pt x="15271" y="21080"/>
+                      <a:pt x="15470" y="21279"/>
+                    </a:cubicBezTo>
+                    <a:cubicBezTo>
+                      <a:pt x="15584" y="21392"/>
+                      <a:pt x="15726" y="21449"/>
+                      <a:pt x="15868" y="21449"/>
+                    </a:cubicBezTo>
+                    <a:cubicBezTo>
+                      <a:pt x="15982" y="21449"/>
+                      <a:pt x="16124" y="21392"/>
+                      <a:pt x="16238" y="21279"/>
+                    </a:cubicBezTo>
+                    <a:cubicBezTo>
+                      <a:pt x="16437" y="21080"/>
+                      <a:pt x="16437" y="20738"/>
+                      <a:pt x="16238" y="20539"/>
+                    </a:cubicBezTo>
+                    <a:cubicBezTo>
+                      <a:pt x="16138" y="20440"/>
+                      <a:pt x="16003" y="20390"/>
+                      <a:pt x="15865" y="20390"/>
+                    </a:cubicBezTo>
+                    <a:close/>
+                    <a:moveTo>
+                      <a:pt x="13309" y="22921"/>
+                    </a:moveTo>
+                    <a:cubicBezTo>
+                      <a:pt x="13174" y="22921"/>
+                      <a:pt x="13039" y="22971"/>
+                      <a:pt x="12939" y="23070"/>
+                    </a:cubicBezTo>
+                    <a:cubicBezTo>
+                      <a:pt x="12712" y="23298"/>
+                      <a:pt x="12712" y="23639"/>
+                      <a:pt x="12939" y="23838"/>
+                    </a:cubicBezTo>
+                    <a:cubicBezTo>
+                      <a:pt x="13025" y="23952"/>
+                      <a:pt x="13167" y="23980"/>
+                      <a:pt x="13309" y="23980"/>
+                    </a:cubicBezTo>
+                    <a:cubicBezTo>
+                      <a:pt x="13451" y="23980"/>
+                      <a:pt x="13593" y="23952"/>
+                      <a:pt x="13679" y="23838"/>
+                    </a:cubicBezTo>
+                    <a:cubicBezTo>
+                      <a:pt x="13906" y="23639"/>
+                      <a:pt x="13906" y="23298"/>
+                      <a:pt x="13679" y="23070"/>
+                    </a:cubicBezTo>
+                    <a:cubicBezTo>
+                      <a:pt x="13579" y="22971"/>
+                      <a:pt x="13444" y="22921"/>
+                      <a:pt x="13309" y="22921"/>
+                    </a:cubicBezTo>
+                    <a:close/>
+                    <a:moveTo>
+                      <a:pt x="10764" y="25480"/>
+                    </a:moveTo>
+                    <a:cubicBezTo>
+                      <a:pt x="10629" y="25480"/>
+                      <a:pt x="10494" y="25530"/>
+                      <a:pt x="10380" y="25629"/>
+                    </a:cubicBezTo>
+                    <a:cubicBezTo>
+                      <a:pt x="10181" y="25829"/>
+                      <a:pt x="10181" y="26170"/>
+                      <a:pt x="10380" y="26397"/>
+                    </a:cubicBezTo>
+                    <a:cubicBezTo>
+                      <a:pt x="10494" y="26483"/>
+                      <a:pt x="10636" y="26539"/>
+                      <a:pt x="10778" y="26539"/>
+                    </a:cubicBezTo>
+                    <a:cubicBezTo>
+                      <a:pt x="10892" y="26539"/>
+                      <a:pt x="11034" y="26483"/>
+                      <a:pt x="11148" y="26397"/>
+                    </a:cubicBezTo>
+                    <a:cubicBezTo>
+                      <a:pt x="11347" y="26170"/>
+                      <a:pt x="11347" y="25829"/>
+                      <a:pt x="11148" y="25629"/>
+                    </a:cubicBezTo>
+                    <a:cubicBezTo>
+                      <a:pt x="11034" y="25530"/>
+                      <a:pt x="10899" y="25480"/>
+                      <a:pt x="10764" y="25480"/>
+                    </a:cubicBezTo>
+                    <a:close/>
+                    <a:moveTo>
+                      <a:pt x="8219" y="28018"/>
+                    </a:moveTo>
+                    <a:cubicBezTo>
+                      <a:pt x="8084" y="28018"/>
+                      <a:pt x="7949" y="28075"/>
+                      <a:pt x="7849" y="28189"/>
+                    </a:cubicBezTo>
+                    <a:cubicBezTo>
+                      <a:pt x="7622" y="28388"/>
+                      <a:pt x="7622" y="28729"/>
+                      <a:pt x="7849" y="28928"/>
+                    </a:cubicBezTo>
+                    <a:cubicBezTo>
+                      <a:pt x="7934" y="29042"/>
+                      <a:pt x="8077" y="29099"/>
+                      <a:pt x="8219" y="29099"/>
+                    </a:cubicBezTo>
+                    <a:cubicBezTo>
+                      <a:pt x="8361" y="29099"/>
+                      <a:pt x="8475" y="29042"/>
+                      <a:pt x="8588" y="28928"/>
+                    </a:cubicBezTo>
+                    <a:cubicBezTo>
+                      <a:pt x="8787" y="28729"/>
+                      <a:pt x="8787" y="28388"/>
+                      <a:pt x="8588" y="28189"/>
+                    </a:cubicBezTo>
+                    <a:cubicBezTo>
+                      <a:pt x="8489" y="28075"/>
+                      <a:pt x="8354" y="28018"/>
+                      <a:pt x="8219" y="28018"/>
+                    </a:cubicBezTo>
+                    <a:close/>
+                    <a:moveTo>
+                      <a:pt x="5663" y="30570"/>
+                    </a:moveTo>
+                    <a:cubicBezTo>
+                      <a:pt x="5524" y="30570"/>
+                      <a:pt x="5389" y="30620"/>
+                      <a:pt x="5290" y="30720"/>
+                    </a:cubicBezTo>
+                    <a:cubicBezTo>
+                      <a:pt x="5091" y="30947"/>
+                      <a:pt x="5091" y="31260"/>
+                      <a:pt x="5290" y="31487"/>
+                    </a:cubicBezTo>
+                    <a:cubicBezTo>
+                      <a:pt x="5403" y="31573"/>
+                      <a:pt x="5546" y="31630"/>
+                      <a:pt x="5659" y="31630"/>
+                    </a:cubicBezTo>
+                    <a:cubicBezTo>
+                      <a:pt x="5802" y="31630"/>
+                      <a:pt x="5944" y="31573"/>
+                      <a:pt x="6058" y="31487"/>
+                    </a:cubicBezTo>
+                    <a:cubicBezTo>
+                      <a:pt x="6257" y="31260"/>
+                      <a:pt x="6257" y="30947"/>
+                      <a:pt x="6058" y="30720"/>
+                    </a:cubicBezTo>
+                    <a:cubicBezTo>
+                      <a:pt x="5944" y="30620"/>
+                      <a:pt x="5802" y="30570"/>
+                      <a:pt x="5663" y="30570"/>
+                    </a:cubicBezTo>
+                    <a:close/>
+                    <a:moveTo>
+                      <a:pt x="3125" y="33108"/>
+                    </a:moveTo>
+                    <a:cubicBezTo>
+                      <a:pt x="2986" y="33108"/>
+                      <a:pt x="2844" y="33165"/>
+                      <a:pt x="2730" y="33279"/>
+                    </a:cubicBezTo>
+                    <a:cubicBezTo>
+                      <a:pt x="2531" y="33478"/>
+                      <a:pt x="2531" y="33819"/>
+                      <a:pt x="2730" y="34018"/>
+                    </a:cubicBezTo>
+                    <a:cubicBezTo>
+                      <a:pt x="2844" y="34132"/>
+                      <a:pt x="2986" y="34189"/>
+                      <a:pt x="3129" y="34189"/>
+                    </a:cubicBezTo>
+                    <a:cubicBezTo>
+                      <a:pt x="3242" y="34189"/>
+                      <a:pt x="3384" y="34132"/>
+                      <a:pt x="3498" y="34018"/>
+                    </a:cubicBezTo>
+                    <a:cubicBezTo>
+                      <a:pt x="3697" y="33819"/>
+                      <a:pt x="3697" y="33478"/>
+                      <a:pt x="3498" y="33279"/>
+                    </a:cubicBezTo>
+                    <a:cubicBezTo>
+                      <a:pt x="3399" y="33165"/>
+                      <a:pt x="3264" y="33108"/>
+                      <a:pt x="3125" y="33108"/>
+                    </a:cubicBezTo>
+                    <a:close/>
+                    <a:moveTo>
+                      <a:pt x="569" y="35660"/>
+                    </a:moveTo>
+                    <a:cubicBezTo>
+                      <a:pt x="434" y="35660"/>
+                      <a:pt x="299" y="35710"/>
+                      <a:pt x="200" y="35810"/>
+                    </a:cubicBezTo>
+                    <a:cubicBezTo>
+                      <a:pt x="1" y="36037"/>
+                      <a:pt x="1" y="36379"/>
+                      <a:pt x="200" y="36578"/>
+                    </a:cubicBezTo>
+                    <a:cubicBezTo>
+                      <a:pt x="313" y="36691"/>
+                      <a:pt x="427" y="36720"/>
+                      <a:pt x="569" y="36720"/>
+                    </a:cubicBezTo>
+                    <a:cubicBezTo>
+                      <a:pt x="711" y="36720"/>
+                      <a:pt x="854" y="36691"/>
+                      <a:pt x="939" y="36578"/>
+                    </a:cubicBezTo>
+                    <a:cubicBezTo>
+                      <a:pt x="1166" y="36379"/>
+                      <a:pt x="1166" y="36037"/>
+                      <a:pt x="939" y="35810"/>
+                    </a:cubicBezTo>
+                    <a:cubicBezTo>
+                      <a:pt x="839" y="35710"/>
+                      <a:pt x="704" y="35660"/>
+                      <a:pt x="569" y="35660"/>
+                    </a:cubicBezTo>
+                    <a:close/>
+                  </a:path>
+                </a:pathLst>
+              </a:custGeom>
+              <a:solidFill>
+                <a:schemeClr val="accent3"/>
+              </a:solidFill>
+              <a:ln>
+                <a:noFill/>
+              </a:ln>
+            </p:spPr>
+            <p:txBody>
+              <a:bodyPr spcFirstLastPara="1" wrap="square" lIns="91425" tIns="91425" rIns="91425" bIns="91425" anchor="ctr" anchorCtr="0">
+                <a:noAutofit/>
+              </a:bodyPr>
+              <a:lstStyle/>
+              <a:p>
+                <a:pPr marL="0" lvl="0" indent="0" algn="l" rtl="0">
+                  <a:spcBef>
+                    <a:spcPts val="0"/>
+                  </a:spcBef>
+                  <a:spcAft>
+                    <a:spcPts val="0"/>
+                  </a:spcAft>
+                  <a:buNone/>
+                </a:pPr>
+                <a:endParaRPr/>
+              </a:p>
+            </p:txBody>
+          </p:sp>
+          <p:sp>
+            <p:nvSpPr>
+              <p:cNvPr id="28" name="Google Shape;28;p4"/>
+              <p:cNvSpPr/>
+              <p:nvPr/>
+            </p:nvSpPr>
+            <p:spPr>
+              <a:xfrm>
+                <a:off x="4760675" y="353925"/>
+                <a:ext cx="27050" cy="26875"/>
+              </a:xfrm>
+              <a:custGeom>
+                <a:avLst/>
+                <a:gdLst/>
+                <a:ahLst/>
+                <a:cxnLst/>
+                <a:rect l="l" t="t" r="r" b="b"/>
+                <a:pathLst>
+                  <a:path w="1082" h="1075" extrusionOk="0">
+                    <a:moveTo>
+                      <a:pt x="563" y="0"/>
+                    </a:moveTo>
+                    <a:cubicBezTo>
+                      <a:pt x="517" y="0"/>
+                      <a:pt x="471" y="7"/>
+                      <a:pt x="427" y="22"/>
+                    </a:cubicBezTo>
+                    <a:cubicBezTo>
+                      <a:pt x="399" y="22"/>
+                      <a:pt x="370" y="22"/>
+                      <a:pt x="342" y="51"/>
+                    </a:cubicBezTo>
+                    <a:cubicBezTo>
+                      <a:pt x="314" y="51"/>
+                      <a:pt x="285" y="79"/>
+                      <a:pt x="228" y="79"/>
+                    </a:cubicBezTo>
+                    <a:cubicBezTo>
+                      <a:pt x="200" y="107"/>
+                      <a:pt x="200" y="136"/>
+                      <a:pt x="171" y="164"/>
+                    </a:cubicBezTo>
+                    <a:cubicBezTo>
+                      <a:pt x="143" y="193"/>
+                      <a:pt x="115" y="193"/>
+                      <a:pt x="86" y="250"/>
+                    </a:cubicBezTo>
+                    <a:cubicBezTo>
+                      <a:pt x="86" y="278"/>
+                      <a:pt x="58" y="306"/>
+                      <a:pt x="58" y="335"/>
+                    </a:cubicBezTo>
+                    <a:cubicBezTo>
+                      <a:pt x="29" y="363"/>
+                      <a:pt x="29" y="392"/>
+                      <a:pt x="29" y="420"/>
+                    </a:cubicBezTo>
+                    <a:cubicBezTo>
+                      <a:pt x="1" y="449"/>
+                      <a:pt x="1" y="506"/>
+                      <a:pt x="1" y="534"/>
+                    </a:cubicBezTo>
+                    <a:cubicBezTo>
+                      <a:pt x="1" y="562"/>
+                      <a:pt x="1" y="591"/>
+                      <a:pt x="29" y="648"/>
+                    </a:cubicBezTo>
+                    <a:cubicBezTo>
+                      <a:pt x="29" y="676"/>
+                      <a:pt x="29" y="705"/>
+                      <a:pt x="58" y="733"/>
+                    </a:cubicBezTo>
+                    <a:cubicBezTo>
+                      <a:pt x="58" y="761"/>
+                      <a:pt x="86" y="790"/>
+                      <a:pt x="86" y="818"/>
+                    </a:cubicBezTo>
+                    <a:cubicBezTo>
+                      <a:pt x="115" y="847"/>
+                      <a:pt x="143" y="875"/>
+                      <a:pt x="171" y="904"/>
+                    </a:cubicBezTo>
+                    <a:cubicBezTo>
+                      <a:pt x="200" y="932"/>
+                      <a:pt x="200" y="961"/>
+                      <a:pt x="228" y="989"/>
+                    </a:cubicBezTo>
+                    <a:cubicBezTo>
+                      <a:pt x="285" y="989"/>
+                      <a:pt x="314" y="1017"/>
+                      <a:pt x="342" y="1017"/>
+                    </a:cubicBezTo>
+                    <a:cubicBezTo>
+                      <a:pt x="370" y="1046"/>
+                      <a:pt x="399" y="1046"/>
+                      <a:pt x="427" y="1046"/>
+                    </a:cubicBezTo>
+                    <a:cubicBezTo>
+                      <a:pt x="456" y="1074"/>
+                      <a:pt x="513" y="1074"/>
+                      <a:pt x="541" y="1074"/>
+                    </a:cubicBezTo>
+                    <a:cubicBezTo>
+                      <a:pt x="683" y="1074"/>
+                      <a:pt x="825" y="1017"/>
+                      <a:pt x="911" y="904"/>
+                    </a:cubicBezTo>
+                    <a:cubicBezTo>
+                      <a:pt x="939" y="875"/>
+                      <a:pt x="968" y="847"/>
+                      <a:pt x="996" y="818"/>
+                    </a:cubicBezTo>
+                    <a:cubicBezTo>
+                      <a:pt x="996" y="790"/>
+                      <a:pt x="1025" y="761"/>
+                      <a:pt x="1025" y="733"/>
+                    </a:cubicBezTo>
+                    <a:cubicBezTo>
+                      <a:pt x="1053" y="705"/>
+                      <a:pt x="1053" y="676"/>
+                      <a:pt x="1053" y="648"/>
+                    </a:cubicBezTo>
+                    <a:cubicBezTo>
+                      <a:pt x="1081" y="591"/>
+                      <a:pt x="1081" y="562"/>
+                      <a:pt x="1081" y="534"/>
+                    </a:cubicBezTo>
+                    <a:cubicBezTo>
+                      <a:pt x="1081" y="506"/>
+                      <a:pt x="1053" y="449"/>
+                      <a:pt x="1053" y="420"/>
+                    </a:cubicBezTo>
+                    <a:cubicBezTo>
+                      <a:pt x="1053" y="392"/>
+                      <a:pt x="1053" y="363"/>
+                      <a:pt x="1025" y="335"/>
+                    </a:cubicBezTo>
+                    <a:cubicBezTo>
+                      <a:pt x="1025" y="306"/>
+                      <a:pt x="996" y="278"/>
+                      <a:pt x="996" y="250"/>
+                    </a:cubicBezTo>
+                    <a:cubicBezTo>
+                      <a:pt x="968" y="193"/>
+                      <a:pt x="939" y="193"/>
+                      <a:pt x="911" y="164"/>
+                    </a:cubicBezTo>
+                    <a:cubicBezTo>
+                      <a:pt x="826" y="59"/>
+                      <a:pt x="695" y="0"/>
+                      <a:pt x="563" y="0"/>
+                    </a:cubicBezTo>
+                    <a:close/>
+                  </a:path>
+                </a:pathLst>
+              </a:custGeom>
+              <a:solidFill>
+                <a:schemeClr val="accent3"/>
+              </a:solidFill>
+              <a:ln>
+                <a:noFill/>
+              </a:ln>
+            </p:spPr>
+            <p:txBody>
+              <a:bodyPr spcFirstLastPara="1" wrap="square" lIns="91425" tIns="91425" rIns="91425" bIns="91425" anchor="ctr" anchorCtr="0">
+                <a:noAutofit/>
+              </a:bodyPr>
+              <a:lstStyle/>
+              <a:p>
+                <a:pPr marL="0" lvl="0" indent="0" algn="l" rtl="0">
+                  <a:spcBef>
+                    <a:spcPts val="0"/>
+                  </a:spcBef>
+                  <a:spcAft>
+                    <a:spcPts val="0"/>
+                  </a:spcAft>
+                  <a:buNone/>
+                </a:pPr>
+                <a:endParaRPr/>
+              </a:p>
+            </p:txBody>
+          </p:sp>
+        </p:grpSp>
+        <p:sp>
+          <p:nvSpPr>
+            <p:cNvPr id="29" name="Google Shape;29;p4"/>
+            <p:cNvSpPr/>
+            <p:nvPr/>
+          </p:nvSpPr>
+          <p:spPr>
+            <a:xfrm rot="2700000">
+              <a:off x="5143783" y="4164197"/>
+              <a:ext cx="1657859" cy="1677759"/>
+            </a:xfrm>
+            <a:custGeom>
+              <a:avLst/>
+              <a:gdLst/>
+              <a:ahLst/>
+              <a:cxnLst/>
+              <a:rect l="l" t="t" r="r" b="b"/>
+              <a:pathLst>
+                <a:path w="66315" h="67111" extrusionOk="0">
+                  <a:moveTo>
+                    <a:pt x="8446" y="67111"/>
+                  </a:moveTo>
+                  <a:cubicBezTo>
+                    <a:pt x="6171" y="67111"/>
+                    <a:pt x="4067" y="66258"/>
+                    <a:pt x="2474" y="64665"/>
+                  </a:cubicBezTo>
+                  <a:cubicBezTo>
+                    <a:pt x="882" y="63073"/>
+                    <a:pt x="0" y="60940"/>
+                    <a:pt x="0" y="58694"/>
+                  </a:cubicBezTo>
+                  <a:cubicBezTo>
+                    <a:pt x="0" y="56447"/>
+                    <a:pt x="882" y="54343"/>
+                    <a:pt x="2474" y="52750"/>
+                  </a:cubicBezTo>
+                  <a:lnTo>
+                    <a:pt x="51954" y="3271"/>
+                  </a:lnTo>
+                  <a:cubicBezTo>
+                    <a:pt x="55224" y="0"/>
+                    <a:pt x="60570" y="0"/>
+                    <a:pt x="63841" y="3271"/>
+                  </a:cubicBezTo>
+                  <a:lnTo>
+                    <a:pt x="63841" y="3271"/>
+                  </a:lnTo>
+                  <a:cubicBezTo>
+                    <a:pt x="65433" y="4863"/>
+                    <a:pt x="66315" y="6996"/>
+                    <a:pt x="66315" y="9242"/>
+                  </a:cubicBezTo>
+                  <a:cubicBezTo>
+                    <a:pt x="66315" y="11489"/>
+                    <a:pt x="65433" y="13593"/>
+                    <a:pt x="63841" y="15186"/>
+                  </a:cubicBezTo>
+                  <a:lnTo>
+                    <a:pt x="14389" y="64665"/>
+                  </a:lnTo>
+                  <a:cubicBezTo>
+                    <a:pt x="12797" y="66258"/>
+                    <a:pt x="10692" y="67111"/>
+                    <a:pt x="8446" y="67111"/>
+                  </a:cubicBezTo>
+                  <a:close/>
+                  <a:moveTo>
+                    <a:pt x="57897" y="2588"/>
+                  </a:moveTo>
+                  <a:cubicBezTo>
+                    <a:pt x="56191" y="2588"/>
+                    <a:pt x="54485" y="3242"/>
+                    <a:pt x="53205" y="4522"/>
+                  </a:cubicBezTo>
+                  <a:lnTo>
+                    <a:pt x="3725" y="54002"/>
+                  </a:lnTo>
+                  <a:cubicBezTo>
+                    <a:pt x="2474" y="55253"/>
+                    <a:pt x="1792" y="56931"/>
+                    <a:pt x="1792" y="58694"/>
+                  </a:cubicBezTo>
+                  <a:cubicBezTo>
+                    <a:pt x="1792" y="60457"/>
+                    <a:pt x="2474" y="62135"/>
+                    <a:pt x="3725" y="63386"/>
+                  </a:cubicBezTo>
+                  <a:cubicBezTo>
+                    <a:pt x="4977" y="64637"/>
+                    <a:pt x="6654" y="65348"/>
+                    <a:pt x="8418" y="65348"/>
+                  </a:cubicBezTo>
+                  <a:cubicBezTo>
+                    <a:pt x="10209" y="65348"/>
+                    <a:pt x="11858" y="64637"/>
+                    <a:pt x="13138" y="63386"/>
+                  </a:cubicBezTo>
+                  <a:lnTo>
+                    <a:pt x="62589" y="13934"/>
+                  </a:lnTo>
+                  <a:cubicBezTo>
+                    <a:pt x="63841" y="12683"/>
+                    <a:pt x="64523" y="11005"/>
+                    <a:pt x="64523" y="9242"/>
+                  </a:cubicBezTo>
+                  <a:cubicBezTo>
+                    <a:pt x="64523" y="7451"/>
+                    <a:pt x="63841" y="5801"/>
+                    <a:pt x="62589" y="4550"/>
+                  </a:cubicBezTo>
+                  <a:lnTo>
+                    <a:pt x="62589" y="4550"/>
+                  </a:lnTo>
+                  <a:cubicBezTo>
+                    <a:pt x="61310" y="3242"/>
+                    <a:pt x="59604" y="2588"/>
+                    <a:pt x="57897" y="2588"/>
+                  </a:cubicBezTo>
+                  <a:close/>
+                </a:path>
+              </a:pathLst>
+            </a:custGeom>
+            <a:gradFill>
+              <a:gsLst>
+                <a:gs pos="0">
+                  <a:schemeClr val="lt2"/>
+                </a:gs>
+                <a:gs pos="100000">
+                  <a:schemeClr val="accent3"/>
+                </a:gs>
+              </a:gsLst>
+              <a:lin ang="10800025" scaled="0"/>
+            </a:gradFill>
+            <a:ln>
+              <a:noFill/>
+            </a:ln>
+          </p:spPr>
+          <p:txBody>
+            <a:bodyPr spcFirstLastPara="1" wrap="square" lIns="91425" tIns="91425" rIns="91425" bIns="91425" anchor="ctr" anchorCtr="0">
+              <a:noAutofit/>
+            </a:bodyPr>
+            <a:lstStyle/>
+            <a:p>
+              <a:pPr marL="0" lvl="0" indent="0" algn="l" rtl="0">
+                <a:spcBef>
+                  <a:spcPts val="0"/>
+                </a:spcBef>
+                <a:spcAft>
+                  <a:spcPts val="0"/>
+                </a:spcAft>
+                <a:buNone/>
+              </a:pPr>
+              <a:endParaRPr/>
+            </a:p>
+          </p:txBody>
+        </p:sp>
+      </p:grpSp>
+    </p:spTree>
+  </p:cSld>
+  <p:clrMapOvr>
+    <a:masterClrMapping/>
+  </p:clrMapOvr>
+</p:sldLayout>
+</file>
+
+<file path=ppt/slideLayouts/slideLayout3.xml><?xml version="1.0" encoding="utf-8"?>
+<p:sldLayout xmlns:a="http://schemas.openxmlformats.org/drawingml/2006/main" xmlns:r="http://schemas.openxmlformats.org/officeDocument/2006/relationships" xmlns:p="http://schemas.openxmlformats.org/presentationml/2006/main" matchingName="Blank" type="blank">
+  <p:cSld name="BLANK">
+    <p:spTree>
+      <p:nvGrpSpPr>
+        <p:cNvPr id="1" name="Shape 81"/>
+        <p:cNvGrpSpPr/>
+        <p:nvPr/>
+      </p:nvGrpSpPr>
+      <p:grpSpPr>
+        <a:xfrm>
+          <a:off x="0" y="0"/>
+          <a:ext cx="0" cy="0"/>
+          <a:chOff x="0" y="0"/>
+          <a:chExt cx="0" cy="0"/>
+        </a:xfrm>
+      </p:grpSpPr>
+    </p:spTree>
+  </p:cSld>
+  <p:clrMapOvr>
+    <a:masterClrMapping/>
+  </p:clrMapOvr>
+</p:sldLayout>
+</file>
+
+<file path=ppt/slideLayouts/slideLayout4.xml><?xml version="1.0" encoding="utf-8"?>
 <p:sldLayout xmlns:a="http://schemas.openxmlformats.org/drawingml/2006/main" xmlns:r="http://schemas.openxmlformats.org/officeDocument/2006/relationships" xmlns:p="http://schemas.openxmlformats.org/presentationml/2006/main" matchingName="Background">
   <p:cSld name="CUSTOM_9">
     <p:spTree>
@@ -1646,7 +3185,7 @@
 </p:sldLayout>
 </file>
 
-<file path=ppt/slideLayouts/slideLayout3.xml><?xml version="1.0" encoding="utf-8"?>
+<file path=ppt/slideLayouts/slideLayout5.xml><?xml version="1.0" encoding="utf-8"?>
 <p:sldLayout xmlns:a="http://schemas.openxmlformats.org/drawingml/2006/main" xmlns:r="http://schemas.openxmlformats.org/officeDocument/2006/relationships" xmlns:p="http://schemas.openxmlformats.org/presentationml/2006/main" matchingName="Background 1">
   <p:cSld name="CUSTOM_9_1">
     <p:spTree>
@@ -2630,8 +4169,10 @@
   <p:clrMap bg1="lt1" tx1="dk1" bg2="dk2" tx2="lt2" accent1="accent1" accent2="accent2" accent3="accent3" accent4="accent4" accent5="accent5" accent6="accent6" hlink="hlink" folHlink="folHlink"/>
   <p:sldLayoutIdLst>
     <p:sldLayoutId id="2147483648" r:id="rId1"/>
-    <p:sldLayoutId id="2147483673" r:id="rId2"/>
-    <p:sldLayoutId id="2147483674" r:id="rId3"/>
+    <p:sldLayoutId id="2147483650" r:id="rId2"/>
+    <p:sldLayoutId id="2147483658" r:id="rId3"/>
+    <p:sldLayoutId id="2147483673" r:id="rId4"/>
+    <p:sldLayoutId id="2147483674" r:id="rId5"/>
   </p:sldLayoutIdLst>
   <p:hf hdr="0" ftr="0" dt="0"/>
   <p:txStyles>
@@ -4842,7 +6383,7 @@
   <p:cSld>
     <p:spTree>
       <p:nvGrpSpPr>
-        <p:cNvPr id="1" name=""/>
+        <p:cNvPr id="1" name="Shape 301"/>
         <p:cNvGrpSpPr/>
         <p:nvPr/>
       </p:nvGrpSpPr>
@@ -4854,19 +6395,225 @@
           <a:chExt cx="0" cy="0"/>
         </a:xfrm>
       </p:grpSpPr>
+      <p:grpSp>
+        <p:nvGrpSpPr>
+          <p:cNvPr id="306" name="Google Shape;306;p33"/>
+          <p:cNvGrpSpPr/>
+          <p:nvPr/>
+        </p:nvGrpSpPr>
+        <p:grpSpPr>
+          <a:xfrm flipH="1">
+            <a:off x="-140916" y="0"/>
+            <a:ext cx="1590595" cy="875375"/>
+            <a:chOff x="6456464" y="3575600"/>
+            <a:chExt cx="1004100" cy="552601"/>
+          </a:xfrm>
+        </p:grpSpPr>
+        <p:sp>
+          <p:nvSpPr>
+            <p:cNvPr id="307" name="Google Shape;307;p33"/>
+            <p:cNvSpPr/>
+            <p:nvPr/>
+          </p:nvSpPr>
+          <p:spPr>
+            <a:xfrm>
+              <a:off x="6456464" y="3575601"/>
+              <a:ext cx="1004100" cy="552600"/>
+            </a:xfrm>
+            <a:prstGeom prst="roundRect">
+              <a:avLst>
+                <a:gd name="adj" fmla="val 50000"/>
+              </a:avLst>
+            </a:prstGeom>
+            <a:gradFill>
+              <a:gsLst>
+                <a:gs pos="0">
+                  <a:schemeClr val="lt2"/>
+                </a:gs>
+                <a:gs pos="100000">
+                  <a:schemeClr val="accent3"/>
+                </a:gs>
+              </a:gsLst>
+              <a:lin ang="10800025" scaled="0"/>
+            </a:gradFill>
+            <a:ln>
+              <a:noFill/>
+            </a:ln>
+          </p:spPr>
+          <p:txBody>
+            <a:bodyPr spcFirstLastPara="1" wrap="square" lIns="91425" tIns="91425" rIns="91425" bIns="91425" anchor="ctr" anchorCtr="0">
+              <a:noAutofit/>
+            </a:bodyPr>
+            <a:lstStyle/>
+            <a:p>
+              <a:pPr marL="0" lvl="0" indent="0" algn="l" rtl="0">
+                <a:spcBef>
+                  <a:spcPts val="0"/>
+                </a:spcBef>
+                <a:spcAft>
+                  <a:spcPts val="0"/>
+                </a:spcAft>
+                <a:buNone/>
+              </a:pPr>
+              <a:endParaRPr/>
+            </a:p>
+          </p:txBody>
+        </p:sp>
+        <p:sp>
+          <p:nvSpPr>
+            <p:cNvPr id="308" name="Google Shape;308;p33"/>
+            <p:cNvSpPr/>
+            <p:nvPr/>
+          </p:nvSpPr>
+          <p:spPr>
+            <a:xfrm>
+              <a:off x="6456475" y="3575600"/>
+              <a:ext cx="552600" cy="552600"/>
+            </a:xfrm>
+            <a:prstGeom prst="ellipse">
+              <a:avLst/>
+            </a:prstGeom>
+            <a:solidFill>
+              <a:schemeClr val="lt2"/>
+            </a:solidFill>
+            <a:ln>
+              <a:noFill/>
+            </a:ln>
+          </p:spPr>
+          <p:txBody>
+            <a:bodyPr spcFirstLastPara="1" wrap="square" lIns="91425" tIns="91425" rIns="91425" bIns="91425" anchor="ctr" anchorCtr="0">
+              <a:noAutofit/>
+            </a:bodyPr>
+            <a:lstStyle/>
+            <a:p>
+              <a:pPr marL="0" lvl="0" indent="0" algn="l" rtl="0">
+                <a:spcBef>
+                  <a:spcPts val="0"/>
+                </a:spcBef>
+                <a:spcAft>
+                  <a:spcPts val="0"/>
+                </a:spcAft>
+                <a:buNone/>
+              </a:pPr>
+              <a:endParaRPr/>
+            </a:p>
+          </p:txBody>
+        </p:sp>
+      </p:grpSp>
+      <p:grpSp>
+        <p:nvGrpSpPr>
+          <p:cNvPr id="309" name="Google Shape;309;p33"/>
+          <p:cNvGrpSpPr/>
+          <p:nvPr/>
+        </p:nvGrpSpPr>
+        <p:grpSpPr>
+          <a:xfrm flipH="1">
+            <a:off x="-140916" y="4435994"/>
+            <a:ext cx="1249832" cy="707506"/>
+            <a:chOff x="6456475" y="3575600"/>
+            <a:chExt cx="976202" cy="552609"/>
+          </a:xfrm>
+        </p:grpSpPr>
+        <p:sp>
+          <p:nvSpPr>
+            <p:cNvPr id="310" name="Google Shape;310;p33"/>
+            <p:cNvSpPr/>
+            <p:nvPr/>
+          </p:nvSpPr>
+          <p:spPr>
+            <a:xfrm>
+              <a:off x="6456477" y="3575609"/>
+              <a:ext cx="976200" cy="552600"/>
+            </a:xfrm>
+            <a:prstGeom prst="roundRect">
+              <a:avLst>
+                <a:gd name="adj" fmla="val 50000"/>
+              </a:avLst>
+            </a:prstGeom>
+            <a:gradFill>
+              <a:gsLst>
+                <a:gs pos="0">
+                  <a:schemeClr val="accent3"/>
+                </a:gs>
+                <a:gs pos="100000">
+                  <a:schemeClr val="lt2"/>
+                </a:gs>
+              </a:gsLst>
+              <a:lin ang="10800025" scaled="0"/>
+            </a:gradFill>
+            <a:ln>
+              <a:noFill/>
+            </a:ln>
+          </p:spPr>
+          <p:txBody>
+            <a:bodyPr spcFirstLastPara="1" wrap="square" lIns="91425" tIns="91425" rIns="91425" bIns="91425" anchor="ctr" anchorCtr="0">
+              <a:noAutofit/>
+            </a:bodyPr>
+            <a:lstStyle/>
+            <a:p>
+              <a:pPr marL="0" lvl="0" indent="0" algn="l" rtl="0">
+                <a:spcBef>
+                  <a:spcPts val="0"/>
+                </a:spcBef>
+                <a:spcAft>
+                  <a:spcPts val="0"/>
+                </a:spcAft>
+                <a:buNone/>
+              </a:pPr>
+              <a:endParaRPr/>
+            </a:p>
+          </p:txBody>
+        </p:sp>
+        <p:sp>
+          <p:nvSpPr>
+            <p:cNvPr id="311" name="Google Shape;311;p33"/>
+            <p:cNvSpPr/>
+            <p:nvPr/>
+          </p:nvSpPr>
+          <p:spPr>
+            <a:xfrm>
+              <a:off x="6456475" y="3575600"/>
+              <a:ext cx="552600" cy="552600"/>
+            </a:xfrm>
+            <a:prstGeom prst="ellipse">
+              <a:avLst/>
+            </a:prstGeom>
+            <a:solidFill>
+              <a:schemeClr val="accent2"/>
+            </a:solidFill>
+            <a:ln>
+              <a:noFill/>
+            </a:ln>
+          </p:spPr>
+          <p:txBody>
+            <a:bodyPr spcFirstLastPara="1" wrap="square" lIns="91425" tIns="91425" rIns="91425" bIns="91425" anchor="ctr" anchorCtr="0">
+              <a:noAutofit/>
+            </a:bodyPr>
+            <a:lstStyle/>
+            <a:p>
+              <a:pPr marL="0" lvl="0" indent="0" algn="l" rtl="0">
+                <a:spcBef>
+                  <a:spcPts val="0"/>
+                </a:spcBef>
+                <a:spcAft>
+                  <a:spcPts val="0"/>
+                </a:spcAft>
+                <a:buNone/>
+              </a:pPr>
+              <a:endParaRPr/>
+            </a:p>
+          </p:txBody>
+        </p:sp>
+      </p:grpSp>
       <p:sp>
         <p:nvSpPr>
-          <p:cNvPr id="4" name="Google Shape;312;p33">
-            <a:extLst>
-              <a:ext uri="{FF2B5EF4-FFF2-40B4-BE49-F238E27FC236}">
-                <a16:creationId xmlns:a16="http://schemas.microsoft.com/office/drawing/2014/main" id="{78DE070C-AAFD-1BA8-9003-D86688B31021}"/>
-              </a:ext>
-            </a:extLst>
-          </p:cNvPr>
+          <p:cNvPr id="312" name="Google Shape;312;p33"/>
           <p:cNvSpPr txBox="1">
-            <a:spLocks/>
+            <a:spLocks noGrp="1"/>
           </p:cNvSpPr>
-          <p:nvPr/>
+          <p:nvPr>
+            <p:ph type="title"/>
+          </p:nvPr>
         </p:nvSpPr>
         <p:spPr>
           <a:xfrm>
@@ -4881,251 +6628,31 @@
           <a:bodyPr spcFirstLastPara="1" wrap="square" lIns="91425" tIns="91425" rIns="91425" bIns="91425" anchor="t" anchorCtr="0">
             <a:noAutofit/>
           </a:bodyPr>
-          <a:lstStyle>
-            <a:defPPr marR="0" lvl="0" algn="l" rtl="0">
-              <a:lnSpc>
-                <a:spcPct val="100000"/>
-              </a:lnSpc>
+          <a:lstStyle/>
+          <a:p>
+            <a:pPr marL="0" lvl="0" indent="0" algn="ctr" rtl="0">
               <a:spcBef>
                 <a:spcPts val="0"/>
               </a:spcBef>
               <a:spcAft>
                 <a:spcPts val="0"/>
               </a:spcAft>
-            </a:defPPr>
-            <a:lvl1pPr marR="0" lvl="0" algn="l" rtl="0">
-              <a:lnSpc>
-                <a:spcPct val="100000"/>
-              </a:lnSpc>
-              <a:spcBef>
-                <a:spcPts val="0"/>
-              </a:spcBef>
-              <a:spcAft>
-                <a:spcPts val="0"/>
-              </a:spcAft>
-              <a:buClr>
-                <a:srgbClr val="000000"/>
-              </a:buClr>
-              <a:buFont typeface="Arial"/>
-              <a:defRPr sz="1400" b="0" i="0" u="none" strike="noStrike" cap="none">
-                <a:solidFill>
-                  <a:srgbClr val="000000"/>
-                </a:solidFill>
-                <a:latin typeface="Arial"/>
-                <a:ea typeface="Arial"/>
-                <a:cs typeface="Arial"/>
-                <a:sym typeface="Arial"/>
-              </a:defRPr>
-            </a:lvl1pPr>
-            <a:lvl2pPr marR="0" lvl="1" algn="l" rtl="0">
-              <a:lnSpc>
-                <a:spcPct val="100000"/>
-              </a:lnSpc>
-              <a:spcBef>
-                <a:spcPts val="0"/>
-              </a:spcBef>
-              <a:spcAft>
-                <a:spcPts val="0"/>
-              </a:spcAft>
-              <a:buClr>
-                <a:srgbClr val="000000"/>
-              </a:buClr>
-              <a:buFont typeface="Arial"/>
-              <a:defRPr sz="1400" b="0" i="0" u="none" strike="noStrike" cap="none">
-                <a:solidFill>
-                  <a:srgbClr val="000000"/>
-                </a:solidFill>
-                <a:latin typeface="Arial"/>
-                <a:ea typeface="Arial"/>
-                <a:cs typeface="Arial"/>
-                <a:sym typeface="Arial"/>
-              </a:defRPr>
-            </a:lvl2pPr>
-            <a:lvl3pPr marR="0" lvl="2" algn="l" rtl="0">
-              <a:lnSpc>
-                <a:spcPct val="100000"/>
-              </a:lnSpc>
-              <a:spcBef>
-                <a:spcPts val="0"/>
-              </a:spcBef>
-              <a:spcAft>
-                <a:spcPts val="0"/>
-              </a:spcAft>
-              <a:buClr>
-                <a:srgbClr val="000000"/>
-              </a:buClr>
-              <a:buFont typeface="Arial"/>
-              <a:defRPr sz="1400" b="0" i="0" u="none" strike="noStrike" cap="none">
-                <a:solidFill>
-                  <a:srgbClr val="000000"/>
-                </a:solidFill>
-                <a:latin typeface="Arial"/>
-                <a:ea typeface="Arial"/>
-                <a:cs typeface="Arial"/>
-                <a:sym typeface="Arial"/>
-              </a:defRPr>
-            </a:lvl3pPr>
-            <a:lvl4pPr marR="0" lvl="3" algn="l" rtl="0">
-              <a:lnSpc>
-                <a:spcPct val="100000"/>
-              </a:lnSpc>
-              <a:spcBef>
-                <a:spcPts val="0"/>
-              </a:spcBef>
-              <a:spcAft>
-                <a:spcPts val="0"/>
-              </a:spcAft>
-              <a:buClr>
-                <a:srgbClr val="000000"/>
-              </a:buClr>
-              <a:buFont typeface="Arial"/>
-              <a:defRPr sz="1400" b="0" i="0" u="none" strike="noStrike" cap="none">
-                <a:solidFill>
-                  <a:srgbClr val="000000"/>
-                </a:solidFill>
-                <a:latin typeface="Arial"/>
-                <a:ea typeface="Arial"/>
-                <a:cs typeface="Arial"/>
-                <a:sym typeface="Arial"/>
-              </a:defRPr>
-            </a:lvl4pPr>
-            <a:lvl5pPr marR="0" lvl="4" algn="l" rtl="0">
-              <a:lnSpc>
-                <a:spcPct val="100000"/>
-              </a:lnSpc>
-              <a:spcBef>
-                <a:spcPts val="0"/>
-              </a:spcBef>
-              <a:spcAft>
-                <a:spcPts val="0"/>
-              </a:spcAft>
-              <a:buClr>
-                <a:srgbClr val="000000"/>
-              </a:buClr>
-              <a:buFont typeface="Arial"/>
-              <a:defRPr sz="1400" b="0" i="0" u="none" strike="noStrike" cap="none">
-                <a:solidFill>
-                  <a:srgbClr val="000000"/>
-                </a:solidFill>
-                <a:latin typeface="Arial"/>
-                <a:ea typeface="Arial"/>
-                <a:cs typeface="Arial"/>
-                <a:sym typeface="Arial"/>
-              </a:defRPr>
-            </a:lvl5pPr>
-            <a:lvl6pPr marR="0" lvl="5" algn="l" rtl="0">
-              <a:lnSpc>
-                <a:spcPct val="100000"/>
-              </a:lnSpc>
-              <a:spcBef>
-                <a:spcPts val="0"/>
-              </a:spcBef>
-              <a:spcAft>
-                <a:spcPts val="0"/>
-              </a:spcAft>
-              <a:buClr>
-                <a:srgbClr val="000000"/>
-              </a:buClr>
-              <a:buFont typeface="Arial"/>
-              <a:defRPr sz="1400" b="0" i="0" u="none" strike="noStrike" cap="none">
-                <a:solidFill>
-                  <a:srgbClr val="000000"/>
-                </a:solidFill>
-                <a:latin typeface="Arial"/>
-                <a:ea typeface="Arial"/>
-                <a:cs typeface="Arial"/>
-                <a:sym typeface="Arial"/>
-              </a:defRPr>
-            </a:lvl6pPr>
-            <a:lvl7pPr marR="0" lvl="6" algn="l" rtl="0">
-              <a:lnSpc>
-                <a:spcPct val="100000"/>
-              </a:lnSpc>
-              <a:spcBef>
-                <a:spcPts val="0"/>
-              </a:spcBef>
-              <a:spcAft>
-                <a:spcPts val="0"/>
-              </a:spcAft>
-              <a:buClr>
-                <a:srgbClr val="000000"/>
-              </a:buClr>
-              <a:buFont typeface="Arial"/>
-              <a:defRPr sz="1400" b="0" i="0" u="none" strike="noStrike" cap="none">
-                <a:solidFill>
-                  <a:srgbClr val="000000"/>
-                </a:solidFill>
-                <a:latin typeface="Arial"/>
-                <a:ea typeface="Arial"/>
-                <a:cs typeface="Arial"/>
-                <a:sym typeface="Arial"/>
-              </a:defRPr>
-            </a:lvl7pPr>
-            <a:lvl8pPr marR="0" lvl="7" algn="l" rtl="0">
-              <a:lnSpc>
-                <a:spcPct val="100000"/>
-              </a:lnSpc>
-              <a:spcBef>
-                <a:spcPts val="0"/>
-              </a:spcBef>
-              <a:spcAft>
-                <a:spcPts val="0"/>
-              </a:spcAft>
-              <a:buClr>
-                <a:srgbClr val="000000"/>
-              </a:buClr>
-              <a:buFont typeface="Arial"/>
-              <a:defRPr sz="1400" b="0" i="0" u="none" strike="noStrike" cap="none">
-                <a:solidFill>
-                  <a:srgbClr val="000000"/>
-                </a:solidFill>
-                <a:latin typeface="Arial"/>
-                <a:ea typeface="Arial"/>
-                <a:cs typeface="Arial"/>
-                <a:sym typeface="Arial"/>
-              </a:defRPr>
-            </a:lvl8pPr>
-            <a:lvl9pPr marR="0" lvl="8" algn="l" rtl="0">
-              <a:lnSpc>
-                <a:spcPct val="100000"/>
-              </a:lnSpc>
-              <a:spcBef>
-                <a:spcPts val="0"/>
-              </a:spcBef>
-              <a:spcAft>
-                <a:spcPts val="0"/>
-              </a:spcAft>
-              <a:buClr>
-                <a:srgbClr val="000000"/>
-              </a:buClr>
-              <a:buFont typeface="Arial"/>
-              <a:defRPr sz="1400" b="0" i="0" u="none" strike="noStrike" cap="none">
-                <a:solidFill>
-                  <a:srgbClr val="000000"/>
-                </a:solidFill>
-                <a:latin typeface="Arial"/>
-                <a:ea typeface="Arial"/>
-                <a:cs typeface="Arial"/>
-                <a:sym typeface="Arial"/>
-              </a:defRPr>
-            </a:lvl9pPr>
-          </a:lstStyle>
-          <a:p>
-            <a:pPr algn="ctr"/>
+              <a:buNone/>
+            </a:pPr>
             <a:r>
-              <a:rPr lang="en-GB" sz="2800" b="1"/>
+              <a:rPr lang="en" sz="2800" dirty="0"/>
               <a:t>Demo Page</a:t>
             </a:r>
-            <a:endParaRPr lang="en-GB" sz="2800" b="1" dirty="0"/>
+            <a:endParaRPr sz="2800" dirty="0"/>
           </a:p>
         </p:txBody>
       </p:sp>
       <p:sp>
         <p:nvSpPr>
-          <p:cNvPr id="5" name="TextBox 4">
+          <p:cNvPr id="2" name="TextBox 1">
             <a:extLst>
               <a:ext uri="{FF2B5EF4-FFF2-40B4-BE49-F238E27FC236}">
-                <a16:creationId xmlns:a16="http://schemas.microsoft.com/office/drawing/2014/main" id="{050F7518-C539-64EA-0250-E5EB5D7E0B7A}"/>
+                <a16:creationId xmlns:a16="http://schemas.microsoft.com/office/drawing/2014/main" id="{94559E72-DB84-E5C6-656F-C96959A56B45}"/>
               </a:ext>
             </a:extLst>
           </p:cNvPr>
@@ -5134,7 +6661,7 @@
         </p:nvSpPr>
         <p:spPr>
           <a:xfrm>
-            <a:off x="1644492" y="854424"/>
+            <a:off x="1011975" y="1040054"/>
             <a:ext cx="7418800" cy="338554"/>
           </a:xfrm>
           <a:prstGeom prst="rect">
@@ -5164,11 +6691,6 @@
         </p:txBody>
       </p:sp>
     </p:spTree>
-    <p:extLst>
-      <p:ext uri="{BB962C8B-B14F-4D97-AF65-F5344CB8AC3E}">
-        <p14:creationId xmlns:p14="http://schemas.microsoft.com/office/powerpoint/2010/main" val="3325551155"/>
-      </p:ext>
-    </p:extLst>
   </p:cSld>
   <p:clrMapOvr>
     <a:masterClrMapping/>

--- a/template1.pptx
+++ b/template1.pptx
@@ -6617,8 +6617,8 @@
         </p:nvSpPr>
         <p:spPr>
           <a:xfrm>
-            <a:off x="755169" y="151336"/>
-            <a:ext cx="7704000" cy="572700"/>
+            <a:off x="1534103" y="151336"/>
+            <a:ext cx="7327675" cy="572700"/>
           </a:xfrm>
           <a:prstGeom prst="rect">
             <a:avLst/>
